--- a/OptoElectronique/Cours/S5_Optoelectronique_TP_2025.pptx
+++ b/OptoElectronique/Cours/S5_Optoelectronique_TP_2025.pptx
@@ -220,7 +220,7 @@
           <a:p>
             <a:fld id="{729C724E-499D-43AC-8699-CF969D2466FC}" type="datetimeFigureOut">
               <a:rPr lang="fr-FR" smtClean="0"/>
-              <a:t>02/09/2025</a:t>
+              <a:t>20/03/2026</a:t>
             </a:fld>
             <a:endParaRPr lang="fr-FR"/>
           </a:p>
@@ -579,7 +579,7 @@
         <p:cNvPr id="1" name="">
           <a:extLst>
             <a:ext uri="{FF2B5EF4-FFF2-40B4-BE49-F238E27FC236}">
-              <a16:creationId xmlns:a16="http://schemas.microsoft.com/office/drawing/2014/main" id="{27140196-B8E4-07BB-C98C-8BE008D89518}"/>
+              <a16:creationId xmlns:a16="http://schemas.microsoft.com/office/drawing/2014/main" xmlns="" id="{27140196-B8E4-07BB-C98C-8BE008D89518}"/>
             </a:ext>
           </a:extLst>
         </p:cNvPr>
@@ -599,7 +599,7 @@
           <p:cNvPr id="2" name="Espace réservé de l'image des diapositives 1">
             <a:extLst>
               <a:ext uri="{FF2B5EF4-FFF2-40B4-BE49-F238E27FC236}">
-                <a16:creationId xmlns:a16="http://schemas.microsoft.com/office/drawing/2014/main" id="{1682B5E4-5A20-6F25-64BE-48D7A80BE4E3}"/>
+                <a16:creationId xmlns:a16="http://schemas.microsoft.com/office/drawing/2014/main" xmlns="" id="{1682B5E4-5A20-6F25-64BE-48D7A80BE4E3}"/>
               </a:ext>
             </a:extLst>
           </p:cNvPr>
@@ -617,7 +617,7 @@
           <p:cNvPr id="3" name="Espace réservé des notes 2">
             <a:extLst>
               <a:ext uri="{FF2B5EF4-FFF2-40B4-BE49-F238E27FC236}">
-                <a16:creationId xmlns:a16="http://schemas.microsoft.com/office/drawing/2014/main" id="{9B70F146-880C-B278-856E-D1CD7CD3BA08}"/>
+                <a16:creationId xmlns:a16="http://schemas.microsoft.com/office/drawing/2014/main" xmlns="" id="{9B70F146-880C-B278-856E-D1CD7CD3BA08}"/>
               </a:ext>
             </a:extLst>
           </p:cNvPr>
@@ -642,7 +642,7 @@
           <p:cNvPr id="4" name="Espace réservé du numéro de diapositive 3">
             <a:extLst>
               <a:ext uri="{FF2B5EF4-FFF2-40B4-BE49-F238E27FC236}">
-                <a16:creationId xmlns:a16="http://schemas.microsoft.com/office/drawing/2014/main" id="{063008D2-D9AC-6381-391C-C7DCE4144F53}"/>
+                <a16:creationId xmlns:a16="http://schemas.microsoft.com/office/drawing/2014/main" xmlns="" id="{063008D2-D9AC-6381-391C-C7DCE4144F53}"/>
               </a:ext>
             </a:extLst>
           </p:cNvPr>
@@ -701,7 +701,7 @@
           <p:cNvPr id="2" name="Title 1">
             <a:extLst>
               <a:ext uri="{FF2B5EF4-FFF2-40B4-BE49-F238E27FC236}">
-                <a16:creationId xmlns:a16="http://schemas.microsoft.com/office/drawing/2014/main" id="{E0EB8136-4330-4480-80D9-0F6FD970617C}"/>
+                <a16:creationId xmlns:a16="http://schemas.microsoft.com/office/drawing/2014/main" xmlns="" id="{E0EB8136-4330-4480-80D9-0F6FD970617C}"/>
               </a:ext>
             </a:extLst>
           </p:cNvPr>
@@ -740,7 +740,7 @@
           <p:cNvPr id="3" name="Subtitle 2">
             <a:extLst>
               <a:ext uri="{FF2B5EF4-FFF2-40B4-BE49-F238E27FC236}">
-                <a16:creationId xmlns:a16="http://schemas.microsoft.com/office/drawing/2014/main" id="{566E5739-DD96-45FB-B609-3E3447A52FED}"/>
+                <a16:creationId xmlns:a16="http://schemas.microsoft.com/office/drawing/2014/main" xmlns="" id="{566E5739-DD96-45FB-B609-3E3447A52FED}"/>
               </a:ext>
             </a:extLst>
           </p:cNvPr>
@@ -812,7 +812,7 @@
           <p:cNvPr id="4" name="Date Placeholder 3">
             <a:extLst>
               <a:ext uri="{FF2B5EF4-FFF2-40B4-BE49-F238E27FC236}">
-                <a16:creationId xmlns:a16="http://schemas.microsoft.com/office/drawing/2014/main" id="{1B9FF558-51F9-42A2-9944-DBE23DA8B224}"/>
+                <a16:creationId xmlns:a16="http://schemas.microsoft.com/office/drawing/2014/main" xmlns="" id="{1B9FF558-51F9-42A2-9944-DBE23DA8B224}"/>
               </a:ext>
             </a:extLst>
           </p:cNvPr>
@@ -835,7 +835,7 @@
           <a:p>
             <a:fld id="{02AC24A9-CCB6-4F8D-B8DB-C2F3692CFA5A}" type="datetimeFigureOut">
               <a:rPr lang="en-US" smtClean="0"/>
-              <a:t>9/2/2025</a:t>
+              <a:t>3/20/2026</a:t>
             </a:fld>
             <a:endParaRPr lang="en-US" dirty="0"/>
           </a:p>
@@ -846,7 +846,7 @@
           <p:cNvPr id="5" name="Footer Placeholder 4">
             <a:extLst>
               <a:ext uri="{FF2B5EF4-FFF2-40B4-BE49-F238E27FC236}">
-                <a16:creationId xmlns:a16="http://schemas.microsoft.com/office/drawing/2014/main" id="{8B8C0E86-A7F7-4BDC-A637-254E5252DED5}"/>
+                <a16:creationId xmlns:a16="http://schemas.microsoft.com/office/drawing/2014/main" xmlns="" id="{8B8C0E86-A7F7-4BDC-A637-254E5252DED5}"/>
               </a:ext>
             </a:extLst>
           </p:cNvPr>
@@ -871,7 +871,7 @@
           <p:cNvPr id="6" name="Slide Number Placeholder 5">
             <a:extLst>
               <a:ext uri="{FF2B5EF4-FFF2-40B4-BE49-F238E27FC236}">
-                <a16:creationId xmlns:a16="http://schemas.microsoft.com/office/drawing/2014/main" id="{C3D10ADE-E9DA-4E57-BF57-1CCB65219839}"/>
+                <a16:creationId xmlns:a16="http://schemas.microsoft.com/office/drawing/2014/main" xmlns="" id="{C3D10ADE-E9DA-4E57-BF57-1CCB65219839}"/>
               </a:ext>
             </a:extLst>
           </p:cNvPr>
@@ -905,7 +905,7 @@
           <p:cNvPr id="8" name="Rectangle 7">
             <a:extLst>
               <a:ext uri="{FF2B5EF4-FFF2-40B4-BE49-F238E27FC236}">
-                <a16:creationId xmlns:a16="http://schemas.microsoft.com/office/drawing/2014/main" id="{8D06CE56-3881-4ADA-8CEF-D18B02C242A3}"/>
+                <a16:creationId xmlns:a16="http://schemas.microsoft.com/office/drawing/2014/main" xmlns="" id="{8D06CE56-3881-4ADA-8CEF-D18B02C242A3}"/>
               </a:ext>
             </a:extLst>
           </p:cNvPr>
@@ -986,7 +986,7 @@
           <p:cNvPr id="10" name="Rectangle 9">
             <a:extLst>
               <a:ext uri="{FF2B5EF4-FFF2-40B4-BE49-F238E27FC236}">
-                <a16:creationId xmlns:a16="http://schemas.microsoft.com/office/drawing/2014/main" id="{79F3C543-62EC-4433-9C93-A2CD8764E9B4}"/>
+                <a16:creationId xmlns:a16="http://schemas.microsoft.com/office/drawing/2014/main" xmlns="" id="{79F3C543-62EC-4433-9C93-A2CD8764E9B4}"/>
               </a:ext>
             </a:extLst>
           </p:cNvPr>
@@ -1101,7 +1101,7 @@
           <p:cNvPr id="2" name="Title 1">
             <a:extLst>
               <a:ext uri="{FF2B5EF4-FFF2-40B4-BE49-F238E27FC236}">
-                <a16:creationId xmlns:a16="http://schemas.microsoft.com/office/drawing/2014/main" id="{90B32C18-E430-4EC7-BD7C-99D86D012231}"/>
+                <a16:creationId xmlns:a16="http://schemas.microsoft.com/office/drawing/2014/main" xmlns="" id="{90B32C18-E430-4EC7-BD7C-99D86D012231}"/>
               </a:ext>
             </a:extLst>
           </p:cNvPr>
@@ -1130,7 +1130,7 @@
           <p:cNvPr id="3" name="Vertical Text Placeholder 2">
             <a:extLst>
               <a:ext uri="{FF2B5EF4-FFF2-40B4-BE49-F238E27FC236}">
-                <a16:creationId xmlns:a16="http://schemas.microsoft.com/office/drawing/2014/main" id="{8FC5012F-7119-4D94-9717-3862E1C9384E}"/>
+                <a16:creationId xmlns:a16="http://schemas.microsoft.com/office/drawing/2014/main" xmlns="" id="{8FC5012F-7119-4D94-9717-3862E1C9384E}"/>
               </a:ext>
             </a:extLst>
           </p:cNvPr>
@@ -1187,7 +1187,7 @@
           <p:cNvPr id="4" name="Date Placeholder 3">
             <a:extLst>
               <a:ext uri="{FF2B5EF4-FFF2-40B4-BE49-F238E27FC236}">
-                <a16:creationId xmlns:a16="http://schemas.microsoft.com/office/drawing/2014/main" id="{19ED9A4A-D287-4207-9037-70DB007A1707}"/>
+                <a16:creationId xmlns:a16="http://schemas.microsoft.com/office/drawing/2014/main" xmlns="" id="{19ED9A4A-D287-4207-9037-70DB007A1707}"/>
               </a:ext>
             </a:extLst>
           </p:cNvPr>
@@ -1205,7 +1205,7 @@
           <a:p>
             <a:fld id="{02AC24A9-CCB6-4F8D-B8DB-C2F3692CFA5A}" type="datetimeFigureOut">
               <a:rPr lang="en-US" smtClean="0"/>
-              <a:t>9/2/2025</a:t>
+              <a:t>3/20/2026</a:t>
             </a:fld>
             <a:endParaRPr lang="en-US"/>
           </a:p>
@@ -1216,7 +1216,7 @@
           <p:cNvPr id="5" name="Footer Placeholder 4">
             <a:extLst>
               <a:ext uri="{FF2B5EF4-FFF2-40B4-BE49-F238E27FC236}">
-                <a16:creationId xmlns:a16="http://schemas.microsoft.com/office/drawing/2014/main" id="{61ECFCAC-80DB-43BB-B3F1-AC22BACEE360}"/>
+                <a16:creationId xmlns:a16="http://schemas.microsoft.com/office/drawing/2014/main" xmlns="" id="{61ECFCAC-80DB-43BB-B3F1-AC22BACEE360}"/>
               </a:ext>
             </a:extLst>
           </p:cNvPr>
@@ -1241,7 +1241,7 @@
           <p:cNvPr id="6" name="Slide Number Placeholder 5">
             <a:extLst>
               <a:ext uri="{FF2B5EF4-FFF2-40B4-BE49-F238E27FC236}">
-                <a16:creationId xmlns:a16="http://schemas.microsoft.com/office/drawing/2014/main" id="{D7679730-3487-4D94-A0DC-C21684963AB3}"/>
+                <a16:creationId xmlns:a16="http://schemas.microsoft.com/office/drawing/2014/main" xmlns="" id="{D7679730-3487-4D94-A0DC-C21684963AB3}"/>
               </a:ext>
             </a:extLst>
           </p:cNvPr>
@@ -1300,7 +1300,7 @@
           <p:cNvPr id="2" name="Vertical Title 1">
             <a:extLst>
               <a:ext uri="{FF2B5EF4-FFF2-40B4-BE49-F238E27FC236}">
-                <a16:creationId xmlns:a16="http://schemas.microsoft.com/office/drawing/2014/main" id="{B543C89D-929E-4CD1-BCCC-72A14C0335D6}"/>
+                <a16:creationId xmlns:a16="http://schemas.microsoft.com/office/drawing/2014/main" xmlns="" id="{B543C89D-929E-4CD1-BCCC-72A14C0335D6}"/>
               </a:ext>
             </a:extLst>
           </p:cNvPr>
@@ -1334,7 +1334,7 @@
           <p:cNvPr id="3" name="Vertical Text Placeholder 2">
             <a:extLst>
               <a:ext uri="{FF2B5EF4-FFF2-40B4-BE49-F238E27FC236}">
-                <a16:creationId xmlns:a16="http://schemas.microsoft.com/office/drawing/2014/main" id="{FED450EA-A577-4B76-A12F-650BEB20FD8D}"/>
+                <a16:creationId xmlns:a16="http://schemas.microsoft.com/office/drawing/2014/main" xmlns="" id="{FED450EA-A577-4B76-A12F-650BEB20FD8D}"/>
               </a:ext>
             </a:extLst>
           </p:cNvPr>
@@ -1396,7 +1396,7 @@
           <p:cNvPr id="4" name="Date Placeholder 3">
             <a:extLst>
               <a:ext uri="{FF2B5EF4-FFF2-40B4-BE49-F238E27FC236}">
-                <a16:creationId xmlns:a16="http://schemas.microsoft.com/office/drawing/2014/main" id="{41D2603B-9ACE-4FA9-805B-9B91EB63DF7D}"/>
+                <a16:creationId xmlns:a16="http://schemas.microsoft.com/office/drawing/2014/main" xmlns="" id="{41D2603B-9ACE-4FA9-805B-9B91EB63DF7D}"/>
               </a:ext>
             </a:extLst>
           </p:cNvPr>
@@ -1414,7 +1414,7 @@
           <a:p>
             <a:fld id="{02AC24A9-CCB6-4F8D-B8DB-C2F3692CFA5A}" type="datetimeFigureOut">
               <a:rPr lang="en-US" smtClean="0"/>
-              <a:t>9/2/2025</a:t>
+              <a:t>3/20/2026</a:t>
             </a:fld>
             <a:endParaRPr lang="en-US"/>
           </a:p>
@@ -1425,7 +1425,7 @@
           <p:cNvPr id="5" name="Footer Placeholder 4">
             <a:extLst>
               <a:ext uri="{FF2B5EF4-FFF2-40B4-BE49-F238E27FC236}">
-                <a16:creationId xmlns:a16="http://schemas.microsoft.com/office/drawing/2014/main" id="{7ECE18AC-D6A9-4A61-885D-68E2B684A438}"/>
+                <a16:creationId xmlns:a16="http://schemas.microsoft.com/office/drawing/2014/main" xmlns="" id="{7ECE18AC-D6A9-4A61-885D-68E2B684A438}"/>
               </a:ext>
             </a:extLst>
           </p:cNvPr>
@@ -1450,7 +1450,7 @@
           <p:cNvPr id="6" name="Slide Number Placeholder 5">
             <a:extLst>
               <a:ext uri="{FF2B5EF4-FFF2-40B4-BE49-F238E27FC236}">
-                <a16:creationId xmlns:a16="http://schemas.microsoft.com/office/drawing/2014/main" id="{75197AE4-AA47-4E14-8FFE-171FAE47F49E}"/>
+                <a16:creationId xmlns:a16="http://schemas.microsoft.com/office/drawing/2014/main" xmlns="" id="{75197AE4-AA47-4E14-8FFE-171FAE47F49E}"/>
               </a:ext>
             </a:extLst>
           </p:cNvPr>
@@ -1509,7 +1509,7 @@
           <p:cNvPr id="8" name="Rectangle 7">
             <a:extLst>
               <a:ext uri="{FF2B5EF4-FFF2-40B4-BE49-F238E27FC236}">
-                <a16:creationId xmlns:a16="http://schemas.microsoft.com/office/drawing/2014/main" id="{2D6FBB9D-1CAA-4D05-AB33-BABDFE17B843}"/>
+                <a16:creationId xmlns:a16="http://schemas.microsoft.com/office/drawing/2014/main" xmlns="" id="{2D6FBB9D-1CAA-4D05-AB33-BABDFE17B843}"/>
               </a:ext>
             </a:extLst>
           </p:cNvPr>
@@ -1600,7 +1600,7 @@
           <p:cNvPr id="10" name="Rectangle 9">
             <a:extLst>
               <a:ext uri="{FF2B5EF4-FFF2-40B4-BE49-F238E27FC236}">
-                <a16:creationId xmlns:a16="http://schemas.microsoft.com/office/drawing/2014/main" id="{04727B71-B4B6-4823-80A1-68C40B475118}"/>
+                <a16:creationId xmlns:a16="http://schemas.microsoft.com/office/drawing/2014/main" xmlns="" id="{04727B71-B4B6-4823-80A1-68C40B475118}"/>
               </a:ext>
             </a:extLst>
           </p:cNvPr>
@@ -1679,7 +1679,7 @@
           <p:cNvPr id="12" name="Rectangle 11">
             <a:extLst>
               <a:ext uri="{FF2B5EF4-FFF2-40B4-BE49-F238E27FC236}">
-                <a16:creationId xmlns:a16="http://schemas.microsoft.com/office/drawing/2014/main" id="{79A6DB05-9FB5-4B07-8675-74C23D4FD89D}"/>
+                <a16:creationId xmlns:a16="http://schemas.microsoft.com/office/drawing/2014/main" xmlns="" id="{79A6DB05-9FB5-4B07-8675-74C23D4FD89D}"/>
               </a:ext>
             </a:extLst>
           </p:cNvPr>
@@ -1760,7 +1760,7 @@
           <p:cNvPr id="2" name="Title 1">
             <a:extLst>
               <a:ext uri="{FF2B5EF4-FFF2-40B4-BE49-F238E27FC236}">
-                <a16:creationId xmlns:a16="http://schemas.microsoft.com/office/drawing/2014/main" id="{48D358CF-0758-490A-A084-C46443B9ABE8}"/>
+                <a16:creationId xmlns:a16="http://schemas.microsoft.com/office/drawing/2014/main" xmlns="" id="{48D358CF-0758-490A-A084-C46443B9ABE8}"/>
               </a:ext>
             </a:extLst>
           </p:cNvPr>
@@ -1799,7 +1799,7 @@
           <p:cNvPr id="3" name="Content Placeholder 2">
             <a:extLst>
               <a:ext uri="{FF2B5EF4-FFF2-40B4-BE49-F238E27FC236}">
-                <a16:creationId xmlns:a16="http://schemas.microsoft.com/office/drawing/2014/main" id="{21671183-B3CE-4F45-92FB-98290CA0E2CA}"/>
+                <a16:creationId xmlns:a16="http://schemas.microsoft.com/office/drawing/2014/main" xmlns="" id="{21671183-B3CE-4F45-92FB-98290CA0E2CA}"/>
               </a:ext>
             </a:extLst>
           </p:cNvPr>
@@ -1861,7 +1861,7 @@
           <p:cNvPr id="4" name="Date Placeholder 3">
             <a:extLst>
               <a:ext uri="{FF2B5EF4-FFF2-40B4-BE49-F238E27FC236}">
-                <a16:creationId xmlns:a16="http://schemas.microsoft.com/office/drawing/2014/main" id="{3D7DED67-27EC-4D43-A21C-093C1DB04813}"/>
+                <a16:creationId xmlns:a16="http://schemas.microsoft.com/office/drawing/2014/main" xmlns="" id="{3D7DED67-27EC-4D43-A21C-093C1DB04813}"/>
               </a:ext>
             </a:extLst>
           </p:cNvPr>
@@ -1884,7 +1884,7 @@
           <a:p>
             <a:fld id="{02AC24A9-CCB6-4F8D-B8DB-C2F3692CFA5A}" type="datetimeFigureOut">
               <a:rPr lang="en-US" smtClean="0"/>
-              <a:t>9/2/2025</a:t>
+              <a:t>3/20/2026</a:t>
             </a:fld>
             <a:endParaRPr lang="en-US"/>
           </a:p>
@@ -1895,7 +1895,7 @@
           <p:cNvPr id="5" name="Footer Placeholder 4">
             <a:extLst>
               <a:ext uri="{FF2B5EF4-FFF2-40B4-BE49-F238E27FC236}">
-                <a16:creationId xmlns:a16="http://schemas.microsoft.com/office/drawing/2014/main" id="{36747CE3-4890-4BC1-94DB-5D49D02C9933}"/>
+                <a16:creationId xmlns:a16="http://schemas.microsoft.com/office/drawing/2014/main" xmlns="" id="{36747CE3-4890-4BC1-94DB-5D49D02C9933}"/>
               </a:ext>
             </a:extLst>
           </p:cNvPr>
@@ -1920,7 +1920,7 @@
           <p:cNvPr id="6" name="Slide Number Placeholder 5">
             <a:extLst>
               <a:ext uri="{FF2B5EF4-FFF2-40B4-BE49-F238E27FC236}">
-                <a16:creationId xmlns:a16="http://schemas.microsoft.com/office/drawing/2014/main" id="{093C5AD3-D79A-4D46-B25B-822FE0252511}"/>
+                <a16:creationId xmlns:a16="http://schemas.microsoft.com/office/drawing/2014/main" xmlns="" id="{093C5AD3-D79A-4D46-B25B-822FE0252511}"/>
               </a:ext>
             </a:extLst>
           </p:cNvPr>
@@ -1984,7 +1984,7 @@
           <p:cNvPr id="8" name="Rectangle 7">
             <a:extLst>
               <a:ext uri="{FF2B5EF4-FFF2-40B4-BE49-F238E27FC236}">
-                <a16:creationId xmlns:a16="http://schemas.microsoft.com/office/drawing/2014/main" id="{85AEDC5C-2E87-49C6-AB07-A95E5F39ED8E}"/>
+                <a16:creationId xmlns:a16="http://schemas.microsoft.com/office/drawing/2014/main" xmlns="" id="{85AEDC5C-2E87-49C6-AB07-A95E5F39ED8E}"/>
               </a:ext>
             </a:extLst>
           </p:cNvPr>
@@ -2075,7 +2075,7 @@
           <p:cNvPr id="10" name="Rectangle 9">
             <a:extLst>
               <a:ext uri="{FF2B5EF4-FFF2-40B4-BE49-F238E27FC236}">
-                <a16:creationId xmlns:a16="http://schemas.microsoft.com/office/drawing/2014/main" id="{A57D88DE-E462-4C8A-BF99-609390DFB781}"/>
+                <a16:creationId xmlns:a16="http://schemas.microsoft.com/office/drawing/2014/main" xmlns="" id="{A57D88DE-E462-4C8A-BF99-609390DFB781}"/>
               </a:ext>
             </a:extLst>
           </p:cNvPr>
@@ -2156,7 +2156,7 @@
           <p:cNvPr id="2" name="Title 1">
             <a:extLst>
               <a:ext uri="{FF2B5EF4-FFF2-40B4-BE49-F238E27FC236}">
-                <a16:creationId xmlns:a16="http://schemas.microsoft.com/office/drawing/2014/main" id="{B8E44900-E8BF-4B12-8BCB-41076E2B68C7}"/>
+                <a16:creationId xmlns:a16="http://schemas.microsoft.com/office/drawing/2014/main" xmlns="" id="{B8E44900-E8BF-4B12-8BCB-41076E2B68C7}"/>
               </a:ext>
             </a:extLst>
           </p:cNvPr>
@@ -2195,7 +2195,7 @@
           <p:cNvPr id="3" name="Text Placeholder 2">
             <a:extLst>
               <a:ext uri="{FF2B5EF4-FFF2-40B4-BE49-F238E27FC236}">
-                <a16:creationId xmlns:a16="http://schemas.microsoft.com/office/drawing/2014/main" id="{917741F9-B00F-4463-A257-6B66DABD9B4E}"/>
+                <a16:creationId xmlns:a16="http://schemas.microsoft.com/office/drawing/2014/main" xmlns="" id="{917741F9-B00F-4463-A257-6B66DABD9B4E}"/>
               </a:ext>
             </a:extLst>
           </p:cNvPr>
@@ -2320,7 +2320,7 @@
           <p:cNvPr id="4" name="Date Placeholder 3">
             <a:extLst>
               <a:ext uri="{FF2B5EF4-FFF2-40B4-BE49-F238E27FC236}">
-                <a16:creationId xmlns:a16="http://schemas.microsoft.com/office/drawing/2014/main" id="{D48BFA7D-4401-4285-802B-1579165F0D6D}"/>
+                <a16:creationId xmlns:a16="http://schemas.microsoft.com/office/drawing/2014/main" xmlns="" id="{D48BFA7D-4401-4285-802B-1579165F0D6D}"/>
               </a:ext>
             </a:extLst>
           </p:cNvPr>
@@ -2338,7 +2338,7 @@
           <a:p>
             <a:fld id="{02AC24A9-CCB6-4F8D-B8DB-C2F3692CFA5A}" type="datetimeFigureOut">
               <a:rPr lang="en-US" smtClean="0"/>
-              <a:t>9/2/2025</a:t>
+              <a:t>3/20/2026</a:t>
             </a:fld>
             <a:endParaRPr lang="en-US"/>
           </a:p>
@@ -2349,7 +2349,7 @@
           <p:cNvPr id="5" name="Footer Placeholder 4">
             <a:extLst>
               <a:ext uri="{FF2B5EF4-FFF2-40B4-BE49-F238E27FC236}">
-                <a16:creationId xmlns:a16="http://schemas.microsoft.com/office/drawing/2014/main" id="{49A909C5-AA19-4195-8376-9002D5DF4651}"/>
+                <a16:creationId xmlns:a16="http://schemas.microsoft.com/office/drawing/2014/main" xmlns="" id="{49A909C5-AA19-4195-8376-9002D5DF4651}"/>
               </a:ext>
             </a:extLst>
           </p:cNvPr>
@@ -2374,7 +2374,7 @@
           <p:cNvPr id="6" name="Slide Number Placeholder 5">
             <a:extLst>
               <a:ext uri="{FF2B5EF4-FFF2-40B4-BE49-F238E27FC236}">
-                <a16:creationId xmlns:a16="http://schemas.microsoft.com/office/drawing/2014/main" id="{53AC3F32-46E0-47C8-8565-5969A475FDB0}"/>
+                <a16:creationId xmlns:a16="http://schemas.microsoft.com/office/drawing/2014/main" xmlns="" id="{53AC3F32-46E0-47C8-8565-5969A475FDB0}"/>
               </a:ext>
             </a:extLst>
           </p:cNvPr>
@@ -2433,7 +2433,7 @@
           <p:cNvPr id="9" name="Rectangle 8">
             <a:extLst>
               <a:ext uri="{FF2B5EF4-FFF2-40B4-BE49-F238E27FC236}">
-                <a16:creationId xmlns:a16="http://schemas.microsoft.com/office/drawing/2014/main" id="{2076262E-36A0-40C6-ADE6-90CD9FB9B9EA}"/>
+                <a16:creationId xmlns:a16="http://schemas.microsoft.com/office/drawing/2014/main" xmlns="" id="{2076262E-36A0-40C6-ADE6-90CD9FB9B9EA}"/>
               </a:ext>
             </a:extLst>
           </p:cNvPr>
@@ -2524,7 +2524,7 @@
           <p:cNvPr id="11" name="Rectangle 10">
             <a:extLst>
               <a:ext uri="{FF2B5EF4-FFF2-40B4-BE49-F238E27FC236}">
-                <a16:creationId xmlns:a16="http://schemas.microsoft.com/office/drawing/2014/main" id="{42677A9B-4D1D-4D80-912C-24570140A650}"/>
+                <a16:creationId xmlns:a16="http://schemas.microsoft.com/office/drawing/2014/main" xmlns="" id="{42677A9B-4D1D-4D80-912C-24570140A650}"/>
               </a:ext>
             </a:extLst>
           </p:cNvPr>
@@ -2603,7 +2603,7 @@
           <p:cNvPr id="13" name="Rectangle 12">
             <a:extLst>
               <a:ext uri="{FF2B5EF4-FFF2-40B4-BE49-F238E27FC236}">
-                <a16:creationId xmlns:a16="http://schemas.microsoft.com/office/drawing/2014/main" id="{03DC8C98-510F-48C9-82B2-9E4F760A68DF}"/>
+                <a16:creationId xmlns:a16="http://schemas.microsoft.com/office/drawing/2014/main" xmlns="" id="{03DC8C98-510F-48C9-82B2-9E4F760A68DF}"/>
               </a:ext>
             </a:extLst>
           </p:cNvPr>
@@ -2684,7 +2684,7 @@
           <p:cNvPr id="2" name="Title 1">
             <a:extLst>
               <a:ext uri="{FF2B5EF4-FFF2-40B4-BE49-F238E27FC236}">
-                <a16:creationId xmlns:a16="http://schemas.microsoft.com/office/drawing/2014/main" id="{17A078AE-0BC3-48F9-87EC-2DB0CCE7E2AE}"/>
+                <a16:creationId xmlns:a16="http://schemas.microsoft.com/office/drawing/2014/main" xmlns="" id="{17A078AE-0BC3-48F9-87EC-2DB0CCE7E2AE}"/>
               </a:ext>
             </a:extLst>
           </p:cNvPr>
@@ -2723,7 +2723,7 @@
           <p:cNvPr id="3" name="Content Placeholder 2">
             <a:extLst>
               <a:ext uri="{FF2B5EF4-FFF2-40B4-BE49-F238E27FC236}">
-                <a16:creationId xmlns:a16="http://schemas.microsoft.com/office/drawing/2014/main" id="{292A20DF-0829-4336-B59F-FF9D7AA9D8B6}"/>
+                <a16:creationId xmlns:a16="http://schemas.microsoft.com/office/drawing/2014/main" xmlns="" id="{292A20DF-0829-4336-B59F-FF9D7AA9D8B6}"/>
               </a:ext>
             </a:extLst>
           </p:cNvPr>
@@ -2785,7 +2785,7 @@
           <p:cNvPr id="4" name="Content Placeholder 3">
             <a:extLst>
               <a:ext uri="{FF2B5EF4-FFF2-40B4-BE49-F238E27FC236}">
-                <a16:creationId xmlns:a16="http://schemas.microsoft.com/office/drawing/2014/main" id="{7935D01C-CF67-4DF6-B96C-FFC9D5BF847B}"/>
+                <a16:creationId xmlns:a16="http://schemas.microsoft.com/office/drawing/2014/main" xmlns="" id="{7935D01C-CF67-4DF6-B96C-FFC9D5BF847B}"/>
               </a:ext>
             </a:extLst>
           </p:cNvPr>
@@ -2847,7 +2847,7 @@
           <p:cNvPr id="5" name="Date Placeholder 4">
             <a:extLst>
               <a:ext uri="{FF2B5EF4-FFF2-40B4-BE49-F238E27FC236}">
-                <a16:creationId xmlns:a16="http://schemas.microsoft.com/office/drawing/2014/main" id="{29BBD797-6031-4F82-8726-EAB757027FF5}"/>
+                <a16:creationId xmlns:a16="http://schemas.microsoft.com/office/drawing/2014/main" xmlns="" id="{29BBD797-6031-4F82-8726-EAB757027FF5}"/>
               </a:ext>
             </a:extLst>
           </p:cNvPr>
@@ -2870,7 +2870,7 @@
           <a:p>
             <a:fld id="{02AC24A9-CCB6-4F8D-B8DB-C2F3692CFA5A}" type="datetimeFigureOut">
               <a:rPr lang="en-US" smtClean="0"/>
-              <a:t>9/2/2025</a:t>
+              <a:t>3/20/2026</a:t>
             </a:fld>
             <a:endParaRPr lang="en-US"/>
           </a:p>
@@ -2881,7 +2881,7 @@
           <p:cNvPr id="6" name="Footer Placeholder 5">
             <a:extLst>
               <a:ext uri="{FF2B5EF4-FFF2-40B4-BE49-F238E27FC236}">
-                <a16:creationId xmlns:a16="http://schemas.microsoft.com/office/drawing/2014/main" id="{76B3F71C-B897-4909-A75E-8716AD49C156}"/>
+                <a16:creationId xmlns:a16="http://schemas.microsoft.com/office/drawing/2014/main" xmlns="" id="{76B3F71C-B897-4909-A75E-8716AD49C156}"/>
               </a:ext>
             </a:extLst>
           </p:cNvPr>
@@ -2906,7 +2906,7 @@
           <p:cNvPr id="7" name="Slide Number Placeholder 6">
             <a:extLst>
               <a:ext uri="{FF2B5EF4-FFF2-40B4-BE49-F238E27FC236}">
-                <a16:creationId xmlns:a16="http://schemas.microsoft.com/office/drawing/2014/main" id="{4F78BC14-5BB1-405F-A6F3-C07230F085C8}"/>
+                <a16:creationId xmlns:a16="http://schemas.microsoft.com/office/drawing/2014/main" xmlns="" id="{4F78BC14-5BB1-405F-A6F3-C07230F085C8}"/>
               </a:ext>
             </a:extLst>
           </p:cNvPr>
@@ -2970,7 +2970,7 @@
           <p:cNvPr id="11" name="Rectangle 10">
             <a:extLst>
               <a:ext uri="{FF2B5EF4-FFF2-40B4-BE49-F238E27FC236}">
-                <a16:creationId xmlns:a16="http://schemas.microsoft.com/office/drawing/2014/main" id="{6B671BDE-E45C-41A1-9B98-4A607D703855}"/>
+                <a16:creationId xmlns:a16="http://schemas.microsoft.com/office/drawing/2014/main" xmlns="" id="{6B671BDE-E45C-41A1-9B98-4A607D703855}"/>
               </a:ext>
             </a:extLst>
           </p:cNvPr>
@@ -3061,7 +3061,7 @@
           <p:cNvPr id="13" name="Rectangle 12">
             <a:extLst>
               <a:ext uri="{FF2B5EF4-FFF2-40B4-BE49-F238E27FC236}">
-                <a16:creationId xmlns:a16="http://schemas.microsoft.com/office/drawing/2014/main" id="{299500CE-917A-4D03-A7DF-71D8EBBC1537}"/>
+                <a16:creationId xmlns:a16="http://schemas.microsoft.com/office/drawing/2014/main" xmlns="" id="{299500CE-917A-4D03-A7DF-71D8EBBC1537}"/>
               </a:ext>
             </a:extLst>
           </p:cNvPr>
@@ -3140,7 +3140,7 @@
           <p:cNvPr id="15" name="Rectangle 14">
             <a:extLst>
               <a:ext uri="{FF2B5EF4-FFF2-40B4-BE49-F238E27FC236}">
-                <a16:creationId xmlns:a16="http://schemas.microsoft.com/office/drawing/2014/main" id="{C3D0D377-28B0-417D-886B-9483AF064975}"/>
+                <a16:creationId xmlns:a16="http://schemas.microsoft.com/office/drawing/2014/main" xmlns="" id="{C3D0D377-28B0-417D-886B-9483AF064975}"/>
               </a:ext>
             </a:extLst>
           </p:cNvPr>
@@ -3221,7 +3221,7 @@
           <p:cNvPr id="2" name="Title 1">
             <a:extLst>
               <a:ext uri="{FF2B5EF4-FFF2-40B4-BE49-F238E27FC236}">
-                <a16:creationId xmlns:a16="http://schemas.microsoft.com/office/drawing/2014/main" id="{0F8F91F8-0767-40B5-A3AA-72931FC192EA}"/>
+                <a16:creationId xmlns:a16="http://schemas.microsoft.com/office/drawing/2014/main" xmlns="" id="{0F8F91F8-0767-40B5-A3AA-72931FC192EA}"/>
               </a:ext>
             </a:extLst>
           </p:cNvPr>
@@ -3260,7 +3260,7 @@
           <p:cNvPr id="3" name="Text Placeholder 2">
             <a:extLst>
               <a:ext uri="{FF2B5EF4-FFF2-40B4-BE49-F238E27FC236}">
-                <a16:creationId xmlns:a16="http://schemas.microsoft.com/office/drawing/2014/main" id="{AAAE0554-8BEE-4BF6-9519-51B8475D35E1}"/>
+                <a16:creationId xmlns:a16="http://schemas.microsoft.com/office/drawing/2014/main" xmlns="" id="{AAAE0554-8BEE-4BF6-9519-51B8475D35E1}"/>
               </a:ext>
             </a:extLst>
           </p:cNvPr>
@@ -3331,7 +3331,7 @@
           <p:cNvPr id="4" name="Content Placeholder 3">
             <a:extLst>
               <a:ext uri="{FF2B5EF4-FFF2-40B4-BE49-F238E27FC236}">
-                <a16:creationId xmlns:a16="http://schemas.microsoft.com/office/drawing/2014/main" id="{FD4A358D-C930-48E0-B372-06A826B74C47}"/>
+                <a16:creationId xmlns:a16="http://schemas.microsoft.com/office/drawing/2014/main" xmlns="" id="{FD4A358D-C930-48E0-B372-06A826B74C47}"/>
               </a:ext>
             </a:extLst>
           </p:cNvPr>
@@ -3403,7 +3403,7 @@
           <p:cNvPr id="5" name="Text Placeholder 4">
             <a:extLst>
               <a:ext uri="{FF2B5EF4-FFF2-40B4-BE49-F238E27FC236}">
-                <a16:creationId xmlns:a16="http://schemas.microsoft.com/office/drawing/2014/main" id="{83B6615E-4966-4150-83B6-C47591B36383}"/>
+                <a16:creationId xmlns:a16="http://schemas.microsoft.com/office/drawing/2014/main" xmlns="" id="{83B6615E-4966-4150-83B6-C47591B36383}"/>
               </a:ext>
             </a:extLst>
           </p:cNvPr>
@@ -3474,7 +3474,7 @@
           <p:cNvPr id="6" name="Content Placeholder 5">
             <a:extLst>
               <a:ext uri="{FF2B5EF4-FFF2-40B4-BE49-F238E27FC236}">
-                <a16:creationId xmlns:a16="http://schemas.microsoft.com/office/drawing/2014/main" id="{BD409F6B-C17B-4B4F-9F35-5068BDC4E2FD}"/>
+                <a16:creationId xmlns:a16="http://schemas.microsoft.com/office/drawing/2014/main" xmlns="" id="{BD409F6B-C17B-4B4F-9F35-5068BDC4E2FD}"/>
               </a:ext>
             </a:extLst>
           </p:cNvPr>
@@ -3546,7 +3546,7 @@
           <p:cNvPr id="7" name="Date Placeholder 6">
             <a:extLst>
               <a:ext uri="{FF2B5EF4-FFF2-40B4-BE49-F238E27FC236}">
-                <a16:creationId xmlns:a16="http://schemas.microsoft.com/office/drawing/2014/main" id="{C8BC356D-052B-4A9B-8B2F-6665FD325AB3}"/>
+                <a16:creationId xmlns:a16="http://schemas.microsoft.com/office/drawing/2014/main" xmlns="" id="{C8BC356D-052B-4A9B-8B2F-6665FD325AB3}"/>
               </a:ext>
             </a:extLst>
           </p:cNvPr>
@@ -3569,7 +3569,7 @@
           <a:p>
             <a:fld id="{02AC24A9-CCB6-4F8D-B8DB-C2F3692CFA5A}" type="datetimeFigureOut">
               <a:rPr lang="en-US" smtClean="0"/>
-              <a:t>9/2/2025</a:t>
+              <a:t>3/20/2026</a:t>
             </a:fld>
             <a:endParaRPr lang="en-US"/>
           </a:p>
@@ -3580,7 +3580,7 @@
           <p:cNvPr id="8" name="Footer Placeholder 7">
             <a:extLst>
               <a:ext uri="{FF2B5EF4-FFF2-40B4-BE49-F238E27FC236}">
-                <a16:creationId xmlns:a16="http://schemas.microsoft.com/office/drawing/2014/main" id="{69C5E5FA-26A9-467C-93E3-8476142D1D46}"/>
+                <a16:creationId xmlns:a16="http://schemas.microsoft.com/office/drawing/2014/main" xmlns="" id="{69C5E5FA-26A9-467C-93E3-8476142D1D46}"/>
               </a:ext>
             </a:extLst>
           </p:cNvPr>
@@ -3605,7 +3605,7 @@
           <p:cNvPr id="9" name="Slide Number Placeholder 8">
             <a:extLst>
               <a:ext uri="{FF2B5EF4-FFF2-40B4-BE49-F238E27FC236}">
-                <a16:creationId xmlns:a16="http://schemas.microsoft.com/office/drawing/2014/main" id="{D279E50C-1E40-4B48-871B-E392428D20A3}"/>
+                <a16:creationId xmlns:a16="http://schemas.microsoft.com/office/drawing/2014/main" xmlns="" id="{D279E50C-1E40-4B48-871B-E392428D20A3}"/>
               </a:ext>
             </a:extLst>
           </p:cNvPr>
@@ -3669,7 +3669,7 @@
           <p:cNvPr id="7" name="Rectangle 6">
             <a:extLst>
               <a:ext uri="{FF2B5EF4-FFF2-40B4-BE49-F238E27FC236}">
-                <a16:creationId xmlns:a16="http://schemas.microsoft.com/office/drawing/2014/main" id="{8C0689C4-0DB3-408B-A956-40326B4AE4C4}"/>
+                <a16:creationId xmlns:a16="http://schemas.microsoft.com/office/drawing/2014/main" xmlns="" id="{8C0689C4-0DB3-408B-A956-40326B4AE4C4}"/>
               </a:ext>
             </a:extLst>
           </p:cNvPr>
@@ -3760,7 +3760,7 @@
           <p:cNvPr id="9" name="Rectangle 8">
             <a:extLst>
               <a:ext uri="{FF2B5EF4-FFF2-40B4-BE49-F238E27FC236}">
-                <a16:creationId xmlns:a16="http://schemas.microsoft.com/office/drawing/2014/main" id="{56E1D10E-1C30-41BF-8C3B-C460C9B5597B}"/>
+                <a16:creationId xmlns:a16="http://schemas.microsoft.com/office/drawing/2014/main" xmlns="" id="{56E1D10E-1C30-41BF-8C3B-C460C9B5597B}"/>
               </a:ext>
             </a:extLst>
           </p:cNvPr>
@@ -3841,7 +3841,7 @@
           <p:cNvPr id="2" name="Title 1">
             <a:extLst>
               <a:ext uri="{FF2B5EF4-FFF2-40B4-BE49-F238E27FC236}">
-                <a16:creationId xmlns:a16="http://schemas.microsoft.com/office/drawing/2014/main" id="{779454F2-0EE5-4888-AF4C-82F825E6226E}"/>
+                <a16:creationId xmlns:a16="http://schemas.microsoft.com/office/drawing/2014/main" xmlns="" id="{779454F2-0EE5-4888-AF4C-82F825E6226E}"/>
               </a:ext>
             </a:extLst>
           </p:cNvPr>
@@ -3880,7 +3880,7 @@
           <p:cNvPr id="3" name="Date Placeholder 2">
             <a:extLst>
               <a:ext uri="{FF2B5EF4-FFF2-40B4-BE49-F238E27FC236}">
-                <a16:creationId xmlns:a16="http://schemas.microsoft.com/office/drawing/2014/main" id="{67C91241-A315-4643-91E5-CF2C25CC903A}"/>
+                <a16:creationId xmlns:a16="http://schemas.microsoft.com/office/drawing/2014/main" xmlns="" id="{67C91241-A315-4643-91E5-CF2C25CC903A}"/>
               </a:ext>
             </a:extLst>
           </p:cNvPr>
@@ -3898,7 +3898,7 @@
           <a:p>
             <a:fld id="{02AC24A9-CCB6-4F8D-B8DB-C2F3692CFA5A}" type="datetimeFigureOut">
               <a:rPr lang="en-US" smtClean="0"/>
-              <a:t>9/2/2025</a:t>
+              <a:t>3/20/2026</a:t>
             </a:fld>
             <a:endParaRPr lang="en-US"/>
           </a:p>
@@ -3909,7 +3909,7 @@
           <p:cNvPr id="4" name="Footer Placeholder 3">
             <a:extLst>
               <a:ext uri="{FF2B5EF4-FFF2-40B4-BE49-F238E27FC236}">
-                <a16:creationId xmlns:a16="http://schemas.microsoft.com/office/drawing/2014/main" id="{22706D86-5479-487D-94C8-76093D84F377}"/>
+                <a16:creationId xmlns:a16="http://schemas.microsoft.com/office/drawing/2014/main" xmlns="" id="{22706D86-5479-487D-94C8-76093D84F377}"/>
               </a:ext>
             </a:extLst>
           </p:cNvPr>
@@ -3934,7 +3934,7 @@
           <p:cNvPr id="5" name="Slide Number Placeholder 4">
             <a:extLst>
               <a:ext uri="{FF2B5EF4-FFF2-40B4-BE49-F238E27FC236}">
-                <a16:creationId xmlns:a16="http://schemas.microsoft.com/office/drawing/2014/main" id="{A7739411-CED6-43D4-868D-A65C4161A72B}"/>
+                <a16:creationId xmlns:a16="http://schemas.microsoft.com/office/drawing/2014/main" xmlns="" id="{A7739411-CED6-43D4-868D-A65C4161A72B}"/>
               </a:ext>
             </a:extLst>
           </p:cNvPr>
@@ -3993,7 +3993,7 @@
           <p:cNvPr id="2" name="Date Placeholder 1">
             <a:extLst>
               <a:ext uri="{FF2B5EF4-FFF2-40B4-BE49-F238E27FC236}">
-                <a16:creationId xmlns:a16="http://schemas.microsoft.com/office/drawing/2014/main" id="{EAC447E0-1D4D-4EF2-B81B-4B2400EE3EDB}"/>
+                <a16:creationId xmlns:a16="http://schemas.microsoft.com/office/drawing/2014/main" xmlns="" id="{EAC447E0-1D4D-4EF2-B81B-4B2400EE3EDB}"/>
               </a:ext>
             </a:extLst>
           </p:cNvPr>
@@ -4011,7 +4011,7 @@
           <a:p>
             <a:fld id="{02AC24A9-CCB6-4F8D-B8DB-C2F3692CFA5A}" type="datetimeFigureOut">
               <a:rPr lang="en-US" smtClean="0"/>
-              <a:t>9/2/2025</a:t>
+              <a:t>3/20/2026</a:t>
             </a:fld>
             <a:endParaRPr lang="en-US"/>
           </a:p>
@@ -4022,7 +4022,7 @@
           <p:cNvPr id="3" name="Footer Placeholder 2">
             <a:extLst>
               <a:ext uri="{FF2B5EF4-FFF2-40B4-BE49-F238E27FC236}">
-                <a16:creationId xmlns:a16="http://schemas.microsoft.com/office/drawing/2014/main" id="{C9984CA0-2A78-4600-9F3D-19B09E790FE8}"/>
+                <a16:creationId xmlns:a16="http://schemas.microsoft.com/office/drawing/2014/main" xmlns="" id="{C9984CA0-2A78-4600-9F3D-19B09E790FE8}"/>
               </a:ext>
             </a:extLst>
           </p:cNvPr>
@@ -4047,7 +4047,7 @@
           <p:cNvPr id="4" name="Slide Number Placeholder 3">
             <a:extLst>
               <a:ext uri="{FF2B5EF4-FFF2-40B4-BE49-F238E27FC236}">
-                <a16:creationId xmlns:a16="http://schemas.microsoft.com/office/drawing/2014/main" id="{38440955-B18E-49D3-AE7B-B331200E34C5}"/>
+                <a16:creationId xmlns:a16="http://schemas.microsoft.com/office/drawing/2014/main" xmlns="" id="{38440955-B18E-49D3-AE7B-B331200E34C5}"/>
               </a:ext>
             </a:extLst>
           </p:cNvPr>
@@ -4106,7 +4106,7 @@
           <p:cNvPr id="9" name="Rectangle 8">
             <a:extLst>
               <a:ext uri="{FF2B5EF4-FFF2-40B4-BE49-F238E27FC236}">
-                <a16:creationId xmlns:a16="http://schemas.microsoft.com/office/drawing/2014/main" id="{1FA417FE-CD1A-486F-A4AC-E4000A2FB18E}"/>
+                <a16:creationId xmlns:a16="http://schemas.microsoft.com/office/drawing/2014/main" xmlns="" id="{1FA417FE-CD1A-486F-A4AC-E4000A2FB18E}"/>
               </a:ext>
             </a:extLst>
           </p:cNvPr>
@@ -4197,7 +4197,7 @@
           <p:cNvPr id="11" name="Rectangle 10">
             <a:extLst>
               <a:ext uri="{FF2B5EF4-FFF2-40B4-BE49-F238E27FC236}">
-                <a16:creationId xmlns:a16="http://schemas.microsoft.com/office/drawing/2014/main" id="{1318F0F5-812B-472C-9408-B80F2553F5E0}"/>
+                <a16:creationId xmlns:a16="http://schemas.microsoft.com/office/drawing/2014/main" xmlns="" id="{1318F0F5-812B-472C-9408-B80F2553F5E0}"/>
               </a:ext>
             </a:extLst>
           </p:cNvPr>
@@ -4278,7 +4278,7 @@
           <p:cNvPr id="2" name="Title 1">
             <a:extLst>
               <a:ext uri="{FF2B5EF4-FFF2-40B4-BE49-F238E27FC236}">
-                <a16:creationId xmlns:a16="http://schemas.microsoft.com/office/drawing/2014/main" id="{47F7751B-CD8F-4F5B-A903-1DCE5D1E8306}"/>
+                <a16:creationId xmlns:a16="http://schemas.microsoft.com/office/drawing/2014/main" xmlns="" id="{47F7751B-CD8F-4F5B-A903-1DCE5D1E8306}"/>
               </a:ext>
             </a:extLst>
           </p:cNvPr>
@@ -4320,7 +4320,7 @@
           <p:cNvPr id="3" name="Content Placeholder 2">
             <a:extLst>
               <a:ext uri="{FF2B5EF4-FFF2-40B4-BE49-F238E27FC236}">
-                <a16:creationId xmlns:a16="http://schemas.microsoft.com/office/drawing/2014/main" id="{EFA55C8A-A0BB-441D-976F-EB56D4382DB6}"/>
+                <a16:creationId xmlns:a16="http://schemas.microsoft.com/office/drawing/2014/main" xmlns="" id="{EFA55C8A-A0BB-441D-976F-EB56D4382DB6}"/>
               </a:ext>
             </a:extLst>
           </p:cNvPr>
@@ -4410,7 +4410,7 @@
           <p:cNvPr id="4" name="Text Placeholder 3">
             <a:extLst>
               <a:ext uri="{FF2B5EF4-FFF2-40B4-BE49-F238E27FC236}">
-                <a16:creationId xmlns:a16="http://schemas.microsoft.com/office/drawing/2014/main" id="{37DE6A51-A2E5-4BFA-B571-9FDFE1BBFB44}"/>
+                <a16:creationId xmlns:a16="http://schemas.microsoft.com/office/drawing/2014/main" xmlns="" id="{37DE6A51-A2E5-4BFA-B571-9FDFE1BBFB44}"/>
               </a:ext>
             </a:extLst>
           </p:cNvPr>
@@ -4483,7 +4483,7 @@
           <p:cNvPr id="5" name="Date Placeholder 4">
             <a:extLst>
               <a:ext uri="{FF2B5EF4-FFF2-40B4-BE49-F238E27FC236}">
-                <a16:creationId xmlns:a16="http://schemas.microsoft.com/office/drawing/2014/main" id="{3D92778A-DD4C-4651-9C53-8B0C44CD8805}"/>
+                <a16:creationId xmlns:a16="http://schemas.microsoft.com/office/drawing/2014/main" xmlns="" id="{3D92778A-DD4C-4651-9C53-8B0C44CD8805}"/>
               </a:ext>
             </a:extLst>
           </p:cNvPr>
@@ -4506,7 +4506,7 @@
           <a:p>
             <a:fld id="{02AC24A9-CCB6-4F8D-B8DB-C2F3692CFA5A}" type="datetimeFigureOut">
               <a:rPr lang="en-US" smtClean="0"/>
-              <a:t>9/2/2025</a:t>
+              <a:t>3/20/2026</a:t>
             </a:fld>
             <a:endParaRPr lang="en-US" dirty="0"/>
           </a:p>
@@ -4517,7 +4517,7 @@
           <p:cNvPr id="6" name="Footer Placeholder 5">
             <a:extLst>
               <a:ext uri="{FF2B5EF4-FFF2-40B4-BE49-F238E27FC236}">
-                <a16:creationId xmlns:a16="http://schemas.microsoft.com/office/drawing/2014/main" id="{9D6C7F66-2DFA-4146-BE1A-CE2890FE45E2}"/>
+                <a16:creationId xmlns:a16="http://schemas.microsoft.com/office/drawing/2014/main" xmlns="" id="{9D6C7F66-2DFA-4146-BE1A-CE2890FE45E2}"/>
               </a:ext>
             </a:extLst>
           </p:cNvPr>
@@ -4542,7 +4542,7 @@
           <p:cNvPr id="7" name="Slide Number Placeholder 6">
             <a:extLst>
               <a:ext uri="{FF2B5EF4-FFF2-40B4-BE49-F238E27FC236}">
-                <a16:creationId xmlns:a16="http://schemas.microsoft.com/office/drawing/2014/main" id="{D285D185-B1B6-4D62-81BE-BE82C80ACA6C}"/>
+                <a16:creationId xmlns:a16="http://schemas.microsoft.com/office/drawing/2014/main" xmlns="" id="{D285D185-B1B6-4D62-81BE-BE82C80ACA6C}"/>
               </a:ext>
             </a:extLst>
           </p:cNvPr>
@@ -4601,7 +4601,7 @@
           <p:cNvPr id="9" name="Rectangle 8">
             <a:extLst>
               <a:ext uri="{FF2B5EF4-FFF2-40B4-BE49-F238E27FC236}">
-                <a16:creationId xmlns:a16="http://schemas.microsoft.com/office/drawing/2014/main" id="{168B77B5-211C-456E-B79F-306CC3619347}"/>
+                <a16:creationId xmlns:a16="http://schemas.microsoft.com/office/drawing/2014/main" xmlns="" id="{168B77B5-211C-456E-B79F-306CC3619347}"/>
               </a:ext>
             </a:extLst>
           </p:cNvPr>
@@ -4692,7 +4692,7 @@
           <p:cNvPr id="11" name="Rectangle 10">
             <a:extLst>
               <a:ext uri="{FF2B5EF4-FFF2-40B4-BE49-F238E27FC236}">
-                <a16:creationId xmlns:a16="http://schemas.microsoft.com/office/drawing/2014/main" id="{3B63C338-194D-4F23-ABEC-60A7EA96F302}"/>
+                <a16:creationId xmlns:a16="http://schemas.microsoft.com/office/drawing/2014/main" xmlns="" id="{3B63C338-194D-4F23-ABEC-60A7EA96F302}"/>
               </a:ext>
             </a:extLst>
           </p:cNvPr>
@@ -4773,7 +4773,7 @@
           <p:cNvPr id="2" name="Title 1">
             <a:extLst>
               <a:ext uri="{FF2B5EF4-FFF2-40B4-BE49-F238E27FC236}">
-                <a16:creationId xmlns:a16="http://schemas.microsoft.com/office/drawing/2014/main" id="{A0C04DCC-0E3E-4F05-9FAC-9FA6CA4B2BAE}"/>
+                <a16:creationId xmlns:a16="http://schemas.microsoft.com/office/drawing/2014/main" xmlns="" id="{A0C04DCC-0E3E-4F05-9FAC-9FA6CA4B2BAE}"/>
               </a:ext>
             </a:extLst>
           </p:cNvPr>
@@ -4815,7 +4815,7 @@
           <p:cNvPr id="3" name="Picture Placeholder 2">
             <a:extLst>
               <a:ext uri="{FF2B5EF4-FFF2-40B4-BE49-F238E27FC236}">
-                <a16:creationId xmlns:a16="http://schemas.microsoft.com/office/drawing/2014/main" id="{EBA29649-B19F-499E-8E9A-3577EAC8F031}"/>
+                <a16:creationId xmlns:a16="http://schemas.microsoft.com/office/drawing/2014/main" xmlns="" id="{EBA29649-B19F-499E-8E9A-3577EAC8F031}"/>
               </a:ext>
             </a:extLst>
           </p:cNvPr>
@@ -4887,7 +4887,7 @@
           <p:cNvPr id="4" name="Text Placeholder 3">
             <a:extLst>
               <a:ext uri="{FF2B5EF4-FFF2-40B4-BE49-F238E27FC236}">
-                <a16:creationId xmlns:a16="http://schemas.microsoft.com/office/drawing/2014/main" id="{1BC9EF2E-A8CD-41A1-B11A-0D8842797A98}"/>
+                <a16:creationId xmlns:a16="http://schemas.microsoft.com/office/drawing/2014/main" xmlns="" id="{1BC9EF2E-A8CD-41A1-B11A-0D8842797A98}"/>
               </a:ext>
             </a:extLst>
           </p:cNvPr>
@@ -4960,7 +4960,7 @@
           <p:cNvPr id="5" name="Date Placeholder 4">
             <a:extLst>
               <a:ext uri="{FF2B5EF4-FFF2-40B4-BE49-F238E27FC236}">
-                <a16:creationId xmlns:a16="http://schemas.microsoft.com/office/drawing/2014/main" id="{B44257B5-0DE0-401F-9171-E8687A97DBA7}"/>
+                <a16:creationId xmlns:a16="http://schemas.microsoft.com/office/drawing/2014/main" xmlns="" id="{B44257B5-0DE0-401F-9171-E8687A97DBA7}"/>
               </a:ext>
             </a:extLst>
           </p:cNvPr>
@@ -4983,7 +4983,7 @@
           <a:p>
             <a:fld id="{02AC24A9-CCB6-4F8D-B8DB-C2F3692CFA5A}" type="datetimeFigureOut">
               <a:rPr lang="en-US" smtClean="0"/>
-              <a:t>9/2/2025</a:t>
+              <a:t>3/20/2026</a:t>
             </a:fld>
             <a:endParaRPr lang="en-US"/>
           </a:p>
@@ -4994,7 +4994,7 @@
           <p:cNvPr id="6" name="Footer Placeholder 5">
             <a:extLst>
               <a:ext uri="{FF2B5EF4-FFF2-40B4-BE49-F238E27FC236}">
-                <a16:creationId xmlns:a16="http://schemas.microsoft.com/office/drawing/2014/main" id="{788CD9AD-D667-4FD4-AA34-428AA0BCD09E}"/>
+                <a16:creationId xmlns:a16="http://schemas.microsoft.com/office/drawing/2014/main" xmlns="" id="{788CD9AD-D667-4FD4-AA34-428AA0BCD09E}"/>
               </a:ext>
             </a:extLst>
           </p:cNvPr>
@@ -5019,7 +5019,7 @@
           <p:cNvPr id="7" name="Slide Number Placeholder 6">
             <a:extLst>
               <a:ext uri="{FF2B5EF4-FFF2-40B4-BE49-F238E27FC236}">
-                <a16:creationId xmlns:a16="http://schemas.microsoft.com/office/drawing/2014/main" id="{18770FB6-F273-4BA6-8B97-9835AC537871}"/>
+                <a16:creationId xmlns:a16="http://schemas.microsoft.com/office/drawing/2014/main" xmlns="" id="{18770FB6-F273-4BA6-8B97-9835AC537871}"/>
               </a:ext>
             </a:extLst>
           </p:cNvPr>
@@ -5083,7 +5083,7 @@
           <p:cNvPr id="2" name="Title Placeholder 1">
             <a:extLst>
               <a:ext uri="{FF2B5EF4-FFF2-40B4-BE49-F238E27FC236}">
-                <a16:creationId xmlns:a16="http://schemas.microsoft.com/office/drawing/2014/main" id="{BB325BDE-35A4-4AAD-960B-C1415864ADD9}"/>
+                <a16:creationId xmlns:a16="http://schemas.microsoft.com/office/drawing/2014/main" xmlns="" id="{BB325BDE-35A4-4AAD-960B-C1415864ADD9}"/>
               </a:ext>
             </a:extLst>
           </p:cNvPr>
@@ -5122,7 +5122,7 @@
           <p:cNvPr id="3" name="Text Placeholder 2">
             <a:extLst>
               <a:ext uri="{FF2B5EF4-FFF2-40B4-BE49-F238E27FC236}">
-                <a16:creationId xmlns:a16="http://schemas.microsoft.com/office/drawing/2014/main" id="{BE459C78-0CC4-4552-93DD-49B4194D005D}"/>
+                <a16:creationId xmlns:a16="http://schemas.microsoft.com/office/drawing/2014/main" xmlns="" id="{BE459C78-0CC4-4552-93DD-49B4194D005D}"/>
               </a:ext>
             </a:extLst>
           </p:cNvPr>
@@ -5190,7 +5190,7 @@
           <p:cNvPr id="4" name="Date Placeholder 3">
             <a:extLst>
               <a:ext uri="{FF2B5EF4-FFF2-40B4-BE49-F238E27FC236}">
-                <a16:creationId xmlns:a16="http://schemas.microsoft.com/office/drawing/2014/main" id="{06744A3C-9C54-46A6-B3EF-5B36362423EB}"/>
+                <a16:creationId xmlns:a16="http://schemas.microsoft.com/office/drawing/2014/main" xmlns="" id="{06744A3C-9C54-46A6-B3EF-5B36362423EB}"/>
               </a:ext>
             </a:extLst>
           </p:cNvPr>
@@ -5226,7 +5226,7 @@
           <a:p>
             <a:fld id="{02AC24A9-CCB6-4F8D-B8DB-C2F3692CFA5A}" type="datetimeFigureOut">
               <a:rPr lang="en-US" smtClean="0"/>
-              <a:t>9/2/2025</a:t>
+              <a:t>3/20/2026</a:t>
             </a:fld>
             <a:endParaRPr lang="en-US"/>
           </a:p>
@@ -5237,7 +5237,7 @@
           <p:cNvPr id="5" name="Footer Placeholder 4">
             <a:extLst>
               <a:ext uri="{FF2B5EF4-FFF2-40B4-BE49-F238E27FC236}">
-                <a16:creationId xmlns:a16="http://schemas.microsoft.com/office/drawing/2014/main" id="{07D5A696-7B4B-4181-A961-7D66556D507F}"/>
+                <a16:creationId xmlns:a16="http://schemas.microsoft.com/office/drawing/2014/main" xmlns="" id="{07D5A696-7B4B-4181-A961-7D66556D507F}"/>
               </a:ext>
             </a:extLst>
           </p:cNvPr>
@@ -5280,7 +5280,7 @@
           <p:cNvPr id="6" name="Slide Number Placeholder 5">
             <a:extLst>
               <a:ext uri="{FF2B5EF4-FFF2-40B4-BE49-F238E27FC236}">
-                <a16:creationId xmlns:a16="http://schemas.microsoft.com/office/drawing/2014/main" id="{23038CB5-8F4A-401D-A3A9-B27DC15B7A81}"/>
+                <a16:creationId xmlns:a16="http://schemas.microsoft.com/office/drawing/2014/main" xmlns="" id="{23038CB5-8F4A-401D-A3A9-B27DC15B7A81}"/>
               </a:ext>
             </a:extLst>
           </p:cNvPr>
@@ -5656,10 +5656,10 @@
           <p:cNvPr id="9" name="Rectangle 8">
             <a:extLst>
               <a:ext uri="{FF2B5EF4-FFF2-40B4-BE49-F238E27FC236}">
-                <a16:creationId xmlns:a16="http://schemas.microsoft.com/office/drawing/2014/main" id="{526E0BFB-CDF1-4990-8C11-AC849311E0A8}"/>
+                <a16:creationId xmlns:a16="http://schemas.microsoft.com/office/drawing/2014/main" xmlns="" id="{526E0BFB-CDF1-4990-8C11-AC849311E0A8}"/>
               </a:ext>
               <a:ext uri="{C183D7F6-B498-43B3-948B-1728B52AA6E4}">
-                <adec:decorative xmlns:adec="http://schemas.microsoft.com/office/drawing/2017/decorative" val="1"/>
+                <adec:decorative xmlns:adec="http://schemas.microsoft.com/office/drawing/2017/decorative" xmlns="" val="1"/>
               </a:ext>
             </a:extLst>
           </p:cNvPr>
@@ -5669,7 +5669,7 @@
           <p:nvPr>
             <p:extLst>
               <p:ext uri="{386F3935-93C4-4BCD-93E2-E3B085C9AB24}">
-                <p16:designElem xmlns:p16="http://schemas.microsoft.com/office/powerpoint/2015/main" val="1"/>
+                <p16:designElem xmlns:p16="http://schemas.microsoft.com/office/powerpoint/2015/main" xmlns="" val="1"/>
               </p:ext>
             </p:extLst>
           </p:nvPr>
@@ -5716,7 +5716,7 @@
           <p:cNvPr id="4" name="Picture 3">
             <a:extLst>
               <a:ext uri="{FF2B5EF4-FFF2-40B4-BE49-F238E27FC236}">
-                <a16:creationId xmlns:a16="http://schemas.microsoft.com/office/drawing/2014/main" id="{4C72F330-992B-B125-739B-F8303ED3A097}"/>
+                <a16:creationId xmlns:a16="http://schemas.microsoft.com/office/drawing/2014/main" xmlns="" id="{4C72F330-992B-B125-739B-F8303ED3A097}"/>
               </a:ext>
             </a:extLst>
           </p:cNvPr>
@@ -5745,10 +5745,10 @@
           <p:cNvPr id="11" name="Rectangle 10">
             <a:extLst>
               <a:ext uri="{FF2B5EF4-FFF2-40B4-BE49-F238E27FC236}">
-                <a16:creationId xmlns:a16="http://schemas.microsoft.com/office/drawing/2014/main" id="{6069A1F8-9BEB-4786-9694-FC48B2D75D21}"/>
+                <a16:creationId xmlns:a16="http://schemas.microsoft.com/office/drawing/2014/main" xmlns="" id="{6069A1F8-9BEB-4786-9694-FC48B2D75D21}"/>
               </a:ext>
               <a:ext uri="{C183D7F6-B498-43B3-948B-1728B52AA6E4}">
-                <adec:decorative xmlns:adec="http://schemas.microsoft.com/office/drawing/2017/decorative" val="1"/>
+                <adec:decorative xmlns:adec="http://schemas.microsoft.com/office/drawing/2017/decorative" xmlns="" val="1"/>
               </a:ext>
             </a:extLst>
           </p:cNvPr>
@@ -5758,7 +5758,7 @@
           <p:nvPr>
             <p:extLst>
               <p:ext uri="{386F3935-93C4-4BCD-93E2-E3B085C9AB24}">
-                <p16:designElem xmlns:p16="http://schemas.microsoft.com/office/powerpoint/2015/main" val="1"/>
+                <p16:designElem xmlns:p16="http://schemas.microsoft.com/office/powerpoint/2015/main" xmlns="" val="1"/>
               </p:ext>
             </p:extLst>
           </p:nvPr>
@@ -5826,7 +5826,7 @@
           <p:cNvPr id="2" name="Titre 1">
             <a:extLst>
               <a:ext uri="{FF2B5EF4-FFF2-40B4-BE49-F238E27FC236}">
-                <a16:creationId xmlns:a16="http://schemas.microsoft.com/office/drawing/2014/main" id="{CF8D1EB8-F6E7-EB54-1CC8-28472070B9FC}"/>
+                <a16:creationId xmlns:a16="http://schemas.microsoft.com/office/drawing/2014/main" xmlns="" id="{CF8D1EB8-F6E7-EB54-1CC8-28472070B9FC}"/>
               </a:ext>
             </a:extLst>
           </p:cNvPr>
@@ -5861,6 +5861,12 @@
               </a:rPr>
               <a:t>Opto</a:t>
             </a:r>
+            <a:r>
+              <a:rPr lang="fr-FR" sz="4400" dirty="0">
+                <a:latin typeface="Bahnschrift SemiBold" panose="020B0502040204020203" pitchFamily="34" charset="0"/>
+              </a:rPr>
+              <a:t/>
+            </a:r>
             <a:br>
               <a:rPr lang="fr-FR" sz="4400" dirty="0">
                 <a:latin typeface="Bahnschrift SemiBold" panose="020B0502040204020203" pitchFamily="34" charset="0"/>
@@ -5900,7 +5906,7 @@
           <p:cNvPr id="3" name="Sous-titre 2">
             <a:extLst>
               <a:ext uri="{FF2B5EF4-FFF2-40B4-BE49-F238E27FC236}">
-                <a16:creationId xmlns:a16="http://schemas.microsoft.com/office/drawing/2014/main" id="{BDFEFAEF-AB6A-BE8F-01E7-845FB609FA07}"/>
+                <a16:creationId xmlns:a16="http://schemas.microsoft.com/office/drawing/2014/main" xmlns="" id="{BDFEFAEF-AB6A-BE8F-01E7-845FB609FA07}"/>
               </a:ext>
             </a:extLst>
           </p:cNvPr>
@@ -5962,10 +5968,10 @@
           <p:cNvPr id="32" name="Rectangle 12">
             <a:extLst>
               <a:ext uri="{FF2B5EF4-FFF2-40B4-BE49-F238E27FC236}">
-                <a16:creationId xmlns:a16="http://schemas.microsoft.com/office/drawing/2014/main" id="{AF2F604E-43BE-4DC3-B983-E071523364F8}"/>
+                <a16:creationId xmlns:a16="http://schemas.microsoft.com/office/drawing/2014/main" xmlns="" id="{AF2F604E-43BE-4DC3-B983-E071523364F8}"/>
               </a:ext>
               <a:ext uri="{C183D7F6-B498-43B3-948B-1728B52AA6E4}">
-                <adec:decorative xmlns:adec="http://schemas.microsoft.com/office/drawing/2017/decorative" val="1"/>
+                <adec:decorative xmlns:adec="http://schemas.microsoft.com/office/drawing/2017/decorative" xmlns="" val="1"/>
               </a:ext>
             </a:extLst>
           </p:cNvPr>
@@ -5975,7 +5981,7 @@
           <p:nvPr>
             <p:extLst>
               <p:ext uri="{386F3935-93C4-4BCD-93E2-E3B085C9AB24}">
-                <p16:designElem xmlns:p16="http://schemas.microsoft.com/office/powerpoint/2015/main" val="1"/>
+                <p16:designElem xmlns:p16="http://schemas.microsoft.com/office/powerpoint/2015/main" xmlns="" val="1"/>
               </p:ext>
             </p:extLst>
           </p:nvPr>
@@ -6054,10 +6060,10 @@
           <p:cNvPr id="33" name="Rectangle 14">
             <a:extLst>
               <a:ext uri="{FF2B5EF4-FFF2-40B4-BE49-F238E27FC236}">
-                <a16:creationId xmlns:a16="http://schemas.microsoft.com/office/drawing/2014/main" id="{08C9B587-E65E-4B52-B37C-ABEBB6E87928}"/>
+                <a16:creationId xmlns:a16="http://schemas.microsoft.com/office/drawing/2014/main" xmlns="" id="{08C9B587-E65E-4B52-B37C-ABEBB6E87928}"/>
               </a:ext>
               <a:ext uri="{C183D7F6-B498-43B3-948B-1728B52AA6E4}">
-                <adec:decorative xmlns:adec="http://schemas.microsoft.com/office/drawing/2017/decorative" val="1"/>
+                <adec:decorative xmlns:adec="http://schemas.microsoft.com/office/drawing/2017/decorative" xmlns="" val="1"/>
               </a:ext>
             </a:extLst>
           </p:cNvPr>
@@ -6067,7 +6073,7 @@
           <p:nvPr>
             <p:extLst>
               <p:ext uri="{386F3935-93C4-4BCD-93E2-E3B085C9AB24}">
-                <p16:designElem xmlns:p16="http://schemas.microsoft.com/office/powerpoint/2015/main" val="1"/>
+                <p16:designElem xmlns:p16="http://schemas.microsoft.com/office/powerpoint/2015/main" xmlns="" val="1"/>
               </p:ext>
             </p:extLst>
           </p:nvPr>
@@ -6144,13 +6150,7 @@
       </p:sp>
       <p:pic>
         <p:nvPicPr>
-          <p:cNvPr id="6" name="Image 5" descr="Une image contenant texte&#10;&#10;Description générée automatiquement">
-            <a:extLst>
-              <a:ext uri="{FF2B5EF4-FFF2-40B4-BE49-F238E27FC236}">
-                <a16:creationId xmlns:a16="http://schemas.microsoft.com/office/drawing/2014/main" id="{3D75D9F9-6192-EA6A-A7C9-F09C6FC342AD}"/>
-              </a:ext>
-            </a:extLst>
-          </p:cNvPr>
+          <p:cNvPr id="12" name="Image 11"/>
           <p:cNvPicPr>
             <a:picLocks noChangeAspect="1"/>
           </p:cNvPicPr>
@@ -6170,8 +6170,8 @@
         </p:blipFill>
         <p:spPr>
           <a:xfrm>
-            <a:off x="168033" y="195172"/>
-            <a:ext cx="2452178" cy="1007326"/>
+            <a:off x="93781" y="145408"/>
+            <a:ext cx="2694463" cy="1106854"/>
           </a:xfrm>
           <a:prstGeom prst="rect">
             <a:avLst/>
@@ -6221,10 +6221,10 @@
           <p:cNvPr id="9" name="Rectangle 8">
             <a:extLst>
               <a:ext uri="{FF2B5EF4-FFF2-40B4-BE49-F238E27FC236}">
-                <a16:creationId xmlns:a16="http://schemas.microsoft.com/office/drawing/2014/main" id="{526E0BFB-CDF1-4990-8C11-AC849311E0A8}"/>
+                <a16:creationId xmlns:a16="http://schemas.microsoft.com/office/drawing/2014/main" xmlns="" id="{526E0BFB-CDF1-4990-8C11-AC849311E0A8}"/>
               </a:ext>
               <a:ext uri="{C183D7F6-B498-43B3-948B-1728B52AA6E4}">
-                <adec:decorative xmlns:adec="http://schemas.microsoft.com/office/drawing/2017/decorative" val="1"/>
+                <adec:decorative xmlns:adec="http://schemas.microsoft.com/office/drawing/2017/decorative" xmlns="" val="1"/>
               </a:ext>
             </a:extLst>
           </p:cNvPr>
@@ -6234,7 +6234,7 @@
           <p:nvPr>
             <p:extLst>
               <p:ext uri="{386F3935-93C4-4BCD-93E2-E3B085C9AB24}">
-                <p16:designElem xmlns:p16="http://schemas.microsoft.com/office/powerpoint/2015/main" val="1"/>
+                <p16:designElem xmlns:p16="http://schemas.microsoft.com/office/powerpoint/2015/main" xmlns="" val="1"/>
               </p:ext>
             </p:extLst>
           </p:nvPr>
@@ -6281,7 +6281,7 @@
           <p:cNvPr id="4" name="Picture 3">
             <a:extLst>
               <a:ext uri="{FF2B5EF4-FFF2-40B4-BE49-F238E27FC236}">
-                <a16:creationId xmlns:a16="http://schemas.microsoft.com/office/drawing/2014/main" id="{4C72F330-992B-B125-739B-F8303ED3A097}"/>
+                <a16:creationId xmlns:a16="http://schemas.microsoft.com/office/drawing/2014/main" xmlns="" id="{4C72F330-992B-B125-739B-F8303ED3A097}"/>
               </a:ext>
             </a:extLst>
           </p:cNvPr>
@@ -6310,10 +6310,10 @@
           <p:cNvPr id="11" name="Rectangle 10">
             <a:extLst>
               <a:ext uri="{FF2B5EF4-FFF2-40B4-BE49-F238E27FC236}">
-                <a16:creationId xmlns:a16="http://schemas.microsoft.com/office/drawing/2014/main" id="{6069A1F8-9BEB-4786-9694-FC48B2D75D21}"/>
+                <a16:creationId xmlns:a16="http://schemas.microsoft.com/office/drawing/2014/main" xmlns="" id="{6069A1F8-9BEB-4786-9694-FC48B2D75D21}"/>
               </a:ext>
               <a:ext uri="{C183D7F6-B498-43B3-948B-1728B52AA6E4}">
-                <adec:decorative xmlns:adec="http://schemas.microsoft.com/office/drawing/2017/decorative" val="1"/>
+                <adec:decorative xmlns:adec="http://schemas.microsoft.com/office/drawing/2017/decorative" xmlns="" val="1"/>
               </a:ext>
             </a:extLst>
           </p:cNvPr>
@@ -6323,7 +6323,7 @@
           <p:nvPr>
             <p:extLst>
               <p:ext uri="{386F3935-93C4-4BCD-93E2-E3B085C9AB24}">
-                <p16:designElem xmlns:p16="http://schemas.microsoft.com/office/powerpoint/2015/main" val="1"/>
+                <p16:designElem xmlns:p16="http://schemas.microsoft.com/office/powerpoint/2015/main" xmlns="" val="1"/>
               </p:ext>
             </p:extLst>
           </p:nvPr>
@@ -6391,7 +6391,7 @@
           <p:cNvPr id="2" name="Titre 1">
             <a:extLst>
               <a:ext uri="{FF2B5EF4-FFF2-40B4-BE49-F238E27FC236}">
-                <a16:creationId xmlns:a16="http://schemas.microsoft.com/office/drawing/2014/main" id="{CF8D1EB8-F6E7-EB54-1CC8-28472070B9FC}"/>
+                <a16:creationId xmlns:a16="http://schemas.microsoft.com/office/drawing/2014/main" xmlns="" id="{CF8D1EB8-F6E7-EB54-1CC8-28472070B9FC}"/>
               </a:ext>
             </a:extLst>
           </p:cNvPr>
@@ -6420,11 +6420,23 @@
               </a:rPr>
               <a:t>Photodétection</a:t>
             </a:r>
+            <a:r>
+              <a:rPr lang="fr-FR" sz="4400" dirty="0">
+                <a:latin typeface="Bahnschrift SemiBold" panose="020B0502040204020203" pitchFamily="34" charset="0"/>
+              </a:rPr>
+              <a:t/>
+            </a:r>
             <a:br>
               <a:rPr lang="fr-FR" sz="4400" dirty="0">
                 <a:latin typeface="Bahnschrift SemiBold" panose="020B0502040204020203" pitchFamily="34" charset="0"/>
               </a:rPr>
             </a:br>
+            <a:r>
+              <a:rPr lang="fr-FR" sz="4400" dirty="0">
+                <a:latin typeface="Bahnschrift SemiBold" panose="020B0502040204020203" pitchFamily="34" charset="0"/>
+              </a:rPr>
+              <a:t/>
+            </a:r>
             <a:br>
               <a:rPr lang="fr-FR" sz="4400" dirty="0">
                 <a:latin typeface="Bahnschrift SemiBold" panose="020B0502040204020203" pitchFamily="34" charset="0"/>
@@ -6444,7 +6456,7 @@
           <p:cNvPr id="3" name="Sous-titre 2">
             <a:extLst>
               <a:ext uri="{FF2B5EF4-FFF2-40B4-BE49-F238E27FC236}">
-                <a16:creationId xmlns:a16="http://schemas.microsoft.com/office/drawing/2014/main" id="{BDFEFAEF-AB6A-BE8F-01E7-845FB609FA07}"/>
+                <a16:creationId xmlns:a16="http://schemas.microsoft.com/office/drawing/2014/main" xmlns="" id="{BDFEFAEF-AB6A-BE8F-01E7-845FB609FA07}"/>
               </a:ext>
             </a:extLst>
           </p:cNvPr>
@@ -6500,10 +6512,10 @@
           <p:cNvPr id="32" name="Rectangle 12">
             <a:extLst>
               <a:ext uri="{FF2B5EF4-FFF2-40B4-BE49-F238E27FC236}">
-                <a16:creationId xmlns:a16="http://schemas.microsoft.com/office/drawing/2014/main" id="{AF2F604E-43BE-4DC3-B983-E071523364F8}"/>
+                <a16:creationId xmlns:a16="http://schemas.microsoft.com/office/drawing/2014/main" xmlns="" id="{AF2F604E-43BE-4DC3-B983-E071523364F8}"/>
               </a:ext>
               <a:ext uri="{C183D7F6-B498-43B3-948B-1728B52AA6E4}">
-                <adec:decorative xmlns:adec="http://schemas.microsoft.com/office/drawing/2017/decorative" val="1"/>
+                <adec:decorative xmlns:adec="http://schemas.microsoft.com/office/drawing/2017/decorative" xmlns="" val="1"/>
               </a:ext>
             </a:extLst>
           </p:cNvPr>
@@ -6513,7 +6525,7 @@
           <p:nvPr>
             <p:extLst>
               <p:ext uri="{386F3935-93C4-4BCD-93E2-E3B085C9AB24}">
-                <p16:designElem xmlns:p16="http://schemas.microsoft.com/office/powerpoint/2015/main" val="1"/>
+                <p16:designElem xmlns:p16="http://schemas.microsoft.com/office/powerpoint/2015/main" xmlns="" val="1"/>
               </p:ext>
             </p:extLst>
           </p:nvPr>
@@ -6592,10 +6604,10 @@
           <p:cNvPr id="33" name="Rectangle 14">
             <a:extLst>
               <a:ext uri="{FF2B5EF4-FFF2-40B4-BE49-F238E27FC236}">
-                <a16:creationId xmlns:a16="http://schemas.microsoft.com/office/drawing/2014/main" id="{08C9B587-E65E-4B52-B37C-ABEBB6E87928}"/>
+                <a16:creationId xmlns:a16="http://schemas.microsoft.com/office/drawing/2014/main" xmlns="" id="{08C9B587-E65E-4B52-B37C-ABEBB6E87928}"/>
               </a:ext>
               <a:ext uri="{C183D7F6-B498-43B3-948B-1728B52AA6E4}">
-                <adec:decorative xmlns:adec="http://schemas.microsoft.com/office/drawing/2017/decorative" val="1"/>
+                <adec:decorative xmlns:adec="http://schemas.microsoft.com/office/drawing/2017/decorative" xmlns="" val="1"/>
               </a:ext>
             </a:extLst>
           </p:cNvPr>
@@ -6605,7 +6617,7 @@
           <p:nvPr>
             <p:extLst>
               <p:ext uri="{386F3935-93C4-4BCD-93E2-E3B085C9AB24}">
-                <p16:designElem xmlns:p16="http://schemas.microsoft.com/office/powerpoint/2015/main" val="1"/>
+                <p16:designElem xmlns:p16="http://schemas.microsoft.com/office/powerpoint/2015/main" xmlns="" val="1"/>
               </p:ext>
             </p:extLst>
           </p:nvPr>
@@ -6682,13 +6694,7 @@
       </p:sp>
       <p:pic>
         <p:nvPicPr>
-          <p:cNvPr id="6" name="Image 5" descr="Une image contenant texte&#10;&#10;Description générée automatiquement">
-            <a:extLst>
-              <a:ext uri="{FF2B5EF4-FFF2-40B4-BE49-F238E27FC236}">
-                <a16:creationId xmlns:a16="http://schemas.microsoft.com/office/drawing/2014/main" id="{3D75D9F9-6192-EA6A-A7C9-F09C6FC342AD}"/>
-              </a:ext>
-            </a:extLst>
-          </p:cNvPr>
+          <p:cNvPr id="10" name="Image 9"/>
           <p:cNvPicPr>
             <a:picLocks noChangeAspect="1"/>
           </p:cNvPicPr>
@@ -6708,8 +6714,8 @@
         </p:blipFill>
         <p:spPr>
           <a:xfrm>
-            <a:off x="168033" y="195172"/>
-            <a:ext cx="2452178" cy="1007326"/>
+            <a:off x="93781" y="145408"/>
+            <a:ext cx="2694463" cy="1106854"/>
           </a:xfrm>
           <a:prstGeom prst="rect">
             <a:avLst/>
@@ -6751,7 +6757,7 @@
           <p:cNvPr id="7" name="Image 6">
             <a:extLst>
               <a:ext uri="{FF2B5EF4-FFF2-40B4-BE49-F238E27FC236}">
-                <a16:creationId xmlns:a16="http://schemas.microsoft.com/office/drawing/2014/main" id="{8AB73770-127F-410F-7D44-3AEA449E7A2C}"/>
+                <a16:creationId xmlns:a16="http://schemas.microsoft.com/office/drawing/2014/main" xmlns="" id="{8AB73770-127F-410F-7D44-3AEA449E7A2C}"/>
               </a:ext>
             </a:extLst>
           </p:cNvPr>
@@ -6781,7 +6787,7 @@
           <p:cNvPr id="2" name="Titre 1">
             <a:extLst>
               <a:ext uri="{FF2B5EF4-FFF2-40B4-BE49-F238E27FC236}">
-                <a16:creationId xmlns:a16="http://schemas.microsoft.com/office/drawing/2014/main" id="{693DE99D-D7A2-89F5-4CDD-A4230BF00E5E}"/>
+                <a16:creationId xmlns:a16="http://schemas.microsoft.com/office/drawing/2014/main" xmlns="" id="{693DE99D-D7A2-89F5-4CDD-A4230BF00E5E}"/>
               </a:ext>
             </a:extLst>
           </p:cNvPr>
@@ -6814,7 +6820,7 @@
           <p:cNvPr id="5" name="ZoneTexte 4">
             <a:extLst>
               <a:ext uri="{FF2B5EF4-FFF2-40B4-BE49-F238E27FC236}">
-                <a16:creationId xmlns:a16="http://schemas.microsoft.com/office/drawing/2014/main" id="{281F139D-B54B-7C7A-6CB5-AF27F925A3C2}"/>
+                <a16:creationId xmlns:a16="http://schemas.microsoft.com/office/drawing/2014/main" xmlns="" id="{281F139D-B54B-7C7A-6CB5-AF27F925A3C2}"/>
               </a:ext>
             </a:extLst>
           </p:cNvPr>
@@ -6874,7 +6880,7 @@
           <p:cNvPr id="6" name="Image 5">
             <a:extLst>
               <a:ext uri="{FF2B5EF4-FFF2-40B4-BE49-F238E27FC236}">
-                <a16:creationId xmlns:a16="http://schemas.microsoft.com/office/drawing/2014/main" id="{56F5300C-80EA-8D56-BEB2-0E236C673058}"/>
+                <a16:creationId xmlns:a16="http://schemas.microsoft.com/office/drawing/2014/main" xmlns="" id="{56F5300C-80EA-8D56-BEB2-0E236C673058}"/>
               </a:ext>
             </a:extLst>
           </p:cNvPr>
@@ -6904,7 +6910,7 @@
           <p:cNvPr id="11" name="Image 10">
             <a:extLst>
               <a:ext uri="{FF2B5EF4-FFF2-40B4-BE49-F238E27FC236}">
-                <a16:creationId xmlns:a16="http://schemas.microsoft.com/office/drawing/2014/main" id="{A80E7F5E-3491-DD54-A447-218B0553A495}"/>
+                <a16:creationId xmlns:a16="http://schemas.microsoft.com/office/drawing/2014/main" xmlns="" id="{A80E7F5E-3491-DD54-A447-218B0553A495}"/>
               </a:ext>
             </a:extLst>
           </p:cNvPr>
@@ -6934,7 +6940,7 @@
           <p:cNvPr id="12" name="Rectangle 11">
             <a:extLst>
               <a:ext uri="{FF2B5EF4-FFF2-40B4-BE49-F238E27FC236}">
-                <a16:creationId xmlns:a16="http://schemas.microsoft.com/office/drawing/2014/main" id="{4D45C889-C661-58C3-BFFA-E496108B4DDE}"/>
+                <a16:creationId xmlns:a16="http://schemas.microsoft.com/office/drawing/2014/main" xmlns="" id="{4D45C889-C661-58C3-BFFA-E496108B4DDE}"/>
               </a:ext>
             </a:extLst>
           </p:cNvPr>
@@ -6990,7 +6996,7 @@
           <p:cNvPr id="13" name="Rectangle 12">
             <a:extLst>
               <a:ext uri="{FF2B5EF4-FFF2-40B4-BE49-F238E27FC236}">
-                <a16:creationId xmlns:a16="http://schemas.microsoft.com/office/drawing/2014/main" id="{59D24501-07DC-9B8F-BEE2-E57E41221B63}"/>
+                <a16:creationId xmlns:a16="http://schemas.microsoft.com/office/drawing/2014/main" xmlns="" id="{59D24501-07DC-9B8F-BEE2-E57E41221B63}"/>
               </a:ext>
             </a:extLst>
           </p:cNvPr>
@@ -7046,7 +7052,7 @@
           <p:cNvPr id="4" name="Image 3">
             <a:extLst>
               <a:ext uri="{FF2B5EF4-FFF2-40B4-BE49-F238E27FC236}">
-                <a16:creationId xmlns:a16="http://schemas.microsoft.com/office/drawing/2014/main" id="{9933810D-9EFB-D7AD-C192-C2D1749BBB86}"/>
+                <a16:creationId xmlns:a16="http://schemas.microsoft.com/office/drawing/2014/main" xmlns="" id="{9933810D-9EFB-D7AD-C192-C2D1749BBB86}"/>
               </a:ext>
             </a:extLst>
           </p:cNvPr>
@@ -7106,7 +7112,7 @@
           <p:cNvPr id="7" name="Image 6">
             <a:extLst>
               <a:ext uri="{FF2B5EF4-FFF2-40B4-BE49-F238E27FC236}">
-                <a16:creationId xmlns:a16="http://schemas.microsoft.com/office/drawing/2014/main" id="{8AB73770-127F-410F-7D44-3AEA449E7A2C}"/>
+                <a16:creationId xmlns:a16="http://schemas.microsoft.com/office/drawing/2014/main" xmlns="" id="{8AB73770-127F-410F-7D44-3AEA449E7A2C}"/>
               </a:ext>
             </a:extLst>
           </p:cNvPr>
@@ -7136,7 +7142,7 @@
           <p:cNvPr id="2" name="Titre 1">
             <a:extLst>
               <a:ext uri="{FF2B5EF4-FFF2-40B4-BE49-F238E27FC236}">
-                <a16:creationId xmlns:a16="http://schemas.microsoft.com/office/drawing/2014/main" id="{693DE99D-D7A2-89F5-4CDD-A4230BF00E5E}"/>
+                <a16:creationId xmlns:a16="http://schemas.microsoft.com/office/drawing/2014/main" xmlns="" id="{693DE99D-D7A2-89F5-4CDD-A4230BF00E5E}"/>
               </a:ext>
             </a:extLst>
           </p:cNvPr>
@@ -7169,7 +7175,7 @@
           <p:cNvPr id="5" name="ZoneTexte 4">
             <a:extLst>
               <a:ext uri="{FF2B5EF4-FFF2-40B4-BE49-F238E27FC236}">
-                <a16:creationId xmlns:a16="http://schemas.microsoft.com/office/drawing/2014/main" id="{281F139D-B54B-7C7A-6CB5-AF27F925A3C2}"/>
+                <a16:creationId xmlns:a16="http://schemas.microsoft.com/office/drawing/2014/main" xmlns="" id="{281F139D-B54B-7C7A-6CB5-AF27F925A3C2}"/>
               </a:ext>
             </a:extLst>
           </p:cNvPr>
@@ -7229,7 +7235,7 @@
           <p:cNvPr id="6" name="Image 5">
             <a:extLst>
               <a:ext uri="{FF2B5EF4-FFF2-40B4-BE49-F238E27FC236}">
-                <a16:creationId xmlns:a16="http://schemas.microsoft.com/office/drawing/2014/main" id="{56F5300C-80EA-8D56-BEB2-0E236C673058}"/>
+                <a16:creationId xmlns:a16="http://schemas.microsoft.com/office/drawing/2014/main" xmlns="" id="{56F5300C-80EA-8D56-BEB2-0E236C673058}"/>
               </a:ext>
             </a:extLst>
           </p:cNvPr>
@@ -7259,7 +7265,7 @@
           <p:cNvPr id="11" name="Image 10">
             <a:extLst>
               <a:ext uri="{FF2B5EF4-FFF2-40B4-BE49-F238E27FC236}">
-                <a16:creationId xmlns:a16="http://schemas.microsoft.com/office/drawing/2014/main" id="{A80E7F5E-3491-DD54-A447-218B0553A495}"/>
+                <a16:creationId xmlns:a16="http://schemas.microsoft.com/office/drawing/2014/main" xmlns="" id="{A80E7F5E-3491-DD54-A447-218B0553A495}"/>
               </a:ext>
             </a:extLst>
           </p:cNvPr>
@@ -7289,7 +7295,7 @@
           <p:cNvPr id="12" name="Rectangle 11">
             <a:extLst>
               <a:ext uri="{FF2B5EF4-FFF2-40B4-BE49-F238E27FC236}">
-                <a16:creationId xmlns:a16="http://schemas.microsoft.com/office/drawing/2014/main" id="{4D45C889-C661-58C3-BFFA-E496108B4DDE}"/>
+                <a16:creationId xmlns:a16="http://schemas.microsoft.com/office/drawing/2014/main" xmlns="" id="{4D45C889-C661-58C3-BFFA-E496108B4DDE}"/>
               </a:ext>
             </a:extLst>
           </p:cNvPr>
@@ -7345,7 +7351,7 @@
           <p:cNvPr id="13" name="Rectangle 12">
             <a:extLst>
               <a:ext uri="{FF2B5EF4-FFF2-40B4-BE49-F238E27FC236}">
-                <a16:creationId xmlns:a16="http://schemas.microsoft.com/office/drawing/2014/main" id="{59D24501-07DC-9B8F-BEE2-E57E41221B63}"/>
+                <a16:creationId xmlns:a16="http://schemas.microsoft.com/office/drawing/2014/main" xmlns="" id="{59D24501-07DC-9B8F-BEE2-E57E41221B63}"/>
               </a:ext>
             </a:extLst>
           </p:cNvPr>
@@ -7401,7 +7407,7 @@
           <p:cNvPr id="8" name="Connecteur droit 7">
             <a:extLst>
               <a:ext uri="{FF2B5EF4-FFF2-40B4-BE49-F238E27FC236}">
-                <a16:creationId xmlns:a16="http://schemas.microsoft.com/office/drawing/2014/main" id="{78C9C485-2033-2105-8303-3D4A9E4A0F72}"/>
+                <a16:creationId xmlns:a16="http://schemas.microsoft.com/office/drawing/2014/main" xmlns="" id="{78C9C485-2033-2105-8303-3D4A9E4A0F72}"/>
               </a:ext>
             </a:extLst>
           </p:cNvPr>
@@ -7442,7 +7448,7 @@
           <p:cNvPr id="10" name="Ellipse 9">
             <a:extLst>
               <a:ext uri="{FF2B5EF4-FFF2-40B4-BE49-F238E27FC236}">
-                <a16:creationId xmlns:a16="http://schemas.microsoft.com/office/drawing/2014/main" id="{F24CBD64-90CE-DFB1-86FA-1191618B4004}"/>
+                <a16:creationId xmlns:a16="http://schemas.microsoft.com/office/drawing/2014/main" xmlns="" id="{F24CBD64-90CE-DFB1-86FA-1191618B4004}"/>
               </a:ext>
             </a:extLst>
           </p:cNvPr>
@@ -7491,7 +7497,7 @@
           <p:cNvPr id="14" name="Ellipse 13">
             <a:extLst>
               <a:ext uri="{FF2B5EF4-FFF2-40B4-BE49-F238E27FC236}">
-                <a16:creationId xmlns:a16="http://schemas.microsoft.com/office/drawing/2014/main" id="{83B44C3E-5E1E-D02B-90E8-79958DC2C4E6}"/>
+                <a16:creationId xmlns:a16="http://schemas.microsoft.com/office/drawing/2014/main" xmlns="" id="{83B44C3E-5E1E-D02B-90E8-79958DC2C4E6}"/>
               </a:ext>
             </a:extLst>
           </p:cNvPr>
@@ -7540,7 +7546,7 @@
           <p:cNvPr id="15" name="Ellipse 14">
             <a:extLst>
               <a:ext uri="{FF2B5EF4-FFF2-40B4-BE49-F238E27FC236}">
-                <a16:creationId xmlns:a16="http://schemas.microsoft.com/office/drawing/2014/main" id="{7EA4F1BA-DEF0-1A17-8BBA-D98612DA7586}"/>
+                <a16:creationId xmlns:a16="http://schemas.microsoft.com/office/drawing/2014/main" xmlns="" id="{7EA4F1BA-DEF0-1A17-8BBA-D98612DA7586}"/>
               </a:ext>
             </a:extLst>
           </p:cNvPr>
@@ -7589,7 +7595,7 @@
           <p:cNvPr id="17" name="ZoneTexte 16">
             <a:extLst>
               <a:ext uri="{FF2B5EF4-FFF2-40B4-BE49-F238E27FC236}">
-                <a16:creationId xmlns:a16="http://schemas.microsoft.com/office/drawing/2014/main" id="{EEC7C10D-7D55-AC26-4887-6A565105EC8B}"/>
+                <a16:creationId xmlns:a16="http://schemas.microsoft.com/office/drawing/2014/main" xmlns="" id="{EEC7C10D-7D55-AC26-4887-6A565105EC8B}"/>
               </a:ext>
             </a:extLst>
           </p:cNvPr>
@@ -7628,7 +7634,7 @@
           <p:cNvPr id="4" name="Image 3">
             <a:extLst>
               <a:ext uri="{FF2B5EF4-FFF2-40B4-BE49-F238E27FC236}">
-                <a16:creationId xmlns:a16="http://schemas.microsoft.com/office/drawing/2014/main" id="{F39D4A0B-CC75-EB5C-DB24-FC537125BBDC}"/>
+                <a16:creationId xmlns:a16="http://schemas.microsoft.com/office/drawing/2014/main" xmlns="" id="{F39D4A0B-CC75-EB5C-DB24-FC537125BBDC}"/>
               </a:ext>
             </a:extLst>
           </p:cNvPr>
@@ -7674,7 +7680,7 @@
         <p:cNvPr id="1" name="">
           <a:extLst>
             <a:ext uri="{FF2B5EF4-FFF2-40B4-BE49-F238E27FC236}">
-              <a16:creationId xmlns:a16="http://schemas.microsoft.com/office/drawing/2014/main" id="{71FE1944-10EE-8B45-724B-99FDCFAF2BE0}"/>
+              <a16:creationId xmlns:a16="http://schemas.microsoft.com/office/drawing/2014/main" xmlns="" id="{71FE1944-10EE-8B45-724B-99FDCFAF2BE0}"/>
             </a:ext>
           </a:extLst>
         </p:cNvPr>
@@ -7694,7 +7700,7 @@
           <p:cNvPr id="7" name="Image 6">
             <a:extLst>
               <a:ext uri="{FF2B5EF4-FFF2-40B4-BE49-F238E27FC236}">
-                <a16:creationId xmlns:a16="http://schemas.microsoft.com/office/drawing/2014/main" id="{CB15E950-4ED7-A83A-649B-5AF2EED0097D}"/>
+                <a16:creationId xmlns:a16="http://schemas.microsoft.com/office/drawing/2014/main" xmlns="" id="{CB15E950-4ED7-A83A-649B-5AF2EED0097D}"/>
               </a:ext>
             </a:extLst>
           </p:cNvPr>
@@ -7724,7 +7730,7 @@
           <p:cNvPr id="2" name="Titre 1">
             <a:extLst>
               <a:ext uri="{FF2B5EF4-FFF2-40B4-BE49-F238E27FC236}">
-                <a16:creationId xmlns:a16="http://schemas.microsoft.com/office/drawing/2014/main" id="{A6E2F921-DF3A-8ABE-427E-B6C109BB2D0D}"/>
+                <a16:creationId xmlns:a16="http://schemas.microsoft.com/office/drawing/2014/main" xmlns="" id="{A6E2F921-DF3A-8ABE-427E-B6C109BB2D0D}"/>
               </a:ext>
             </a:extLst>
           </p:cNvPr>
@@ -7752,7 +7758,7 @@
           <p:cNvPr id="3" name="ZoneTexte 2">
             <a:extLst>
               <a:ext uri="{FF2B5EF4-FFF2-40B4-BE49-F238E27FC236}">
-                <a16:creationId xmlns:a16="http://schemas.microsoft.com/office/drawing/2014/main" id="{ADA2F06C-7D0F-2639-7689-73CFB0F4D0BC}"/>
+                <a16:creationId xmlns:a16="http://schemas.microsoft.com/office/drawing/2014/main" xmlns="" id="{ADA2F06C-7D0F-2639-7689-73CFB0F4D0BC}"/>
               </a:ext>
             </a:extLst>
           </p:cNvPr>
@@ -7791,7 +7797,7 @@
           <p:cNvPr id="8" name="Image 7">
             <a:extLst>
               <a:ext uri="{FF2B5EF4-FFF2-40B4-BE49-F238E27FC236}">
-                <a16:creationId xmlns:a16="http://schemas.microsoft.com/office/drawing/2014/main" id="{B55DCAE4-D6FE-6834-12A8-9822CF61A25A}"/>
+                <a16:creationId xmlns:a16="http://schemas.microsoft.com/office/drawing/2014/main" xmlns="" id="{B55DCAE4-D6FE-6834-12A8-9822CF61A25A}"/>
               </a:ext>
             </a:extLst>
           </p:cNvPr>
@@ -7851,7 +7857,7 @@
           <p:cNvPr id="3" name="Rectangle 2">
             <a:extLst>
               <a:ext uri="{FF2B5EF4-FFF2-40B4-BE49-F238E27FC236}">
-                <a16:creationId xmlns:a16="http://schemas.microsoft.com/office/drawing/2014/main" id="{69EEE2CD-304C-7206-E015-F52A5695E8DF}"/>
+                <a16:creationId xmlns:a16="http://schemas.microsoft.com/office/drawing/2014/main" xmlns="" id="{69EEE2CD-304C-7206-E015-F52A5695E8DF}"/>
               </a:ext>
             </a:extLst>
           </p:cNvPr>
@@ -7914,7 +7920,7 @@
           <p:cNvPr id="2" name="Titre 1">
             <a:extLst>
               <a:ext uri="{FF2B5EF4-FFF2-40B4-BE49-F238E27FC236}">
-                <a16:creationId xmlns:a16="http://schemas.microsoft.com/office/drawing/2014/main" id="{97F71108-8121-4CC2-3ED6-50ABC11E79C5}"/>
+                <a16:creationId xmlns:a16="http://schemas.microsoft.com/office/drawing/2014/main" xmlns="" id="{97F71108-8121-4CC2-3ED6-50ABC11E79C5}"/>
               </a:ext>
             </a:extLst>
           </p:cNvPr>
@@ -7968,7 +7974,7 @@
           <p:cNvPr id="7" name="Rectangle 6">
             <a:extLst>
               <a:ext uri="{FF2B5EF4-FFF2-40B4-BE49-F238E27FC236}">
-                <a16:creationId xmlns:a16="http://schemas.microsoft.com/office/drawing/2014/main" id="{E97ACAFF-7D28-E79D-9EB4-4FEEF5BB9613}"/>
+                <a16:creationId xmlns:a16="http://schemas.microsoft.com/office/drawing/2014/main" xmlns="" id="{E97ACAFF-7D28-E79D-9EB4-4FEEF5BB9613}"/>
               </a:ext>
             </a:extLst>
           </p:cNvPr>
@@ -8015,48 +8021,12 @@
           </a:p>
         </p:txBody>
       </p:sp>
-      <p:pic>
-        <p:nvPicPr>
-          <p:cNvPr id="4" name="Image 3" descr="Une image contenant texte&#10;&#10;Description générée automatiquement">
-            <a:extLst>
-              <a:ext uri="{FF2B5EF4-FFF2-40B4-BE49-F238E27FC236}">
-                <a16:creationId xmlns:a16="http://schemas.microsoft.com/office/drawing/2014/main" id="{9BFF7F1D-2708-E366-DB38-F68C1FBD99DC}"/>
-              </a:ext>
-            </a:extLst>
-          </p:cNvPr>
-          <p:cNvPicPr>
-            <a:picLocks noChangeAspect="1"/>
-          </p:cNvPicPr>
-          <p:nvPr/>
-        </p:nvPicPr>
-        <p:blipFill>
-          <a:blip r:embed="rId2" cstate="print">
-            <a:extLst>
-              <a:ext uri="{28A0092B-C50C-407E-A947-70E740481C1C}">
-                <a14:useLocalDpi xmlns:a14="http://schemas.microsoft.com/office/drawing/2010/main" val="0"/>
-              </a:ext>
-            </a:extLst>
-          </a:blip>
-          <a:stretch>
-            <a:fillRect/>
-          </a:stretch>
-        </p:blipFill>
-        <p:spPr>
-          <a:xfrm>
-            <a:off x="9808481" y="509288"/>
-            <a:ext cx="1825291" cy="749808"/>
-          </a:xfrm>
-          <a:prstGeom prst="rect">
-            <a:avLst/>
-          </a:prstGeom>
-        </p:spPr>
-      </p:pic>
       <p:sp>
         <p:nvSpPr>
           <p:cNvPr id="12" name="Flèche : pentagone 11">
             <a:extLst>
               <a:ext uri="{FF2B5EF4-FFF2-40B4-BE49-F238E27FC236}">
-                <a16:creationId xmlns:a16="http://schemas.microsoft.com/office/drawing/2014/main" id="{4BFD9744-0876-5047-18DF-17BB5AA72CFD}"/>
+                <a16:creationId xmlns:a16="http://schemas.microsoft.com/office/drawing/2014/main" xmlns="" id="{4BFD9744-0876-5047-18DF-17BB5AA72CFD}"/>
               </a:ext>
             </a:extLst>
           </p:cNvPr>
@@ -8108,7 +8078,7 @@
           <p:cNvPr id="13" name="Flèche : pentagone 12">
             <a:extLst>
               <a:ext uri="{FF2B5EF4-FFF2-40B4-BE49-F238E27FC236}">
-                <a16:creationId xmlns:a16="http://schemas.microsoft.com/office/drawing/2014/main" id="{2F01100B-DA0A-03DB-8881-9744D6158B2F}"/>
+                <a16:creationId xmlns:a16="http://schemas.microsoft.com/office/drawing/2014/main" xmlns="" id="{2F01100B-DA0A-03DB-8881-9744D6158B2F}"/>
               </a:ext>
             </a:extLst>
           </p:cNvPr>
@@ -8160,7 +8130,7 @@
           <p:cNvPr id="21" name="ZoneTexte 20">
             <a:extLst>
               <a:ext uri="{FF2B5EF4-FFF2-40B4-BE49-F238E27FC236}">
-                <a16:creationId xmlns:a16="http://schemas.microsoft.com/office/drawing/2014/main" id="{BE614CFB-345A-A05F-31A8-899F09B08114}"/>
+                <a16:creationId xmlns:a16="http://schemas.microsoft.com/office/drawing/2014/main" xmlns="" id="{BE614CFB-345A-A05F-31A8-899F09B08114}"/>
               </a:ext>
             </a:extLst>
           </p:cNvPr>
@@ -8195,7 +8165,7 @@
           <p:cNvPr id="22" name="Rectangle 21">
             <a:extLst>
               <a:ext uri="{FF2B5EF4-FFF2-40B4-BE49-F238E27FC236}">
-                <a16:creationId xmlns:a16="http://schemas.microsoft.com/office/drawing/2014/main" id="{8D4A82AA-5EA4-6EB3-63EC-257B2C083A72}"/>
+                <a16:creationId xmlns:a16="http://schemas.microsoft.com/office/drawing/2014/main" xmlns="" id="{8D4A82AA-5EA4-6EB3-63EC-257B2C083A72}"/>
               </a:ext>
             </a:extLst>
           </p:cNvPr>
@@ -8247,7 +8217,7 @@
           <p:cNvPr id="14" name="Flèche : pentagone 13">
             <a:extLst>
               <a:ext uri="{FF2B5EF4-FFF2-40B4-BE49-F238E27FC236}">
-                <a16:creationId xmlns:a16="http://schemas.microsoft.com/office/drawing/2014/main" id="{862561DF-5E53-4B2F-2083-D2A26DEB7A9C}"/>
+                <a16:creationId xmlns:a16="http://schemas.microsoft.com/office/drawing/2014/main" xmlns="" id="{862561DF-5E53-4B2F-2083-D2A26DEB7A9C}"/>
               </a:ext>
             </a:extLst>
           </p:cNvPr>
@@ -8299,7 +8269,7 @@
           <p:cNvPr id="23" name="ZoneTexte 22">
             <a:extLst>
               <a:ext uri="{FF2B5EF4-FFF2-40B4-BE49-F238E27FC236}">
-                <a16:creationId xmlns:a16="http://schemas.microsoft.com/office/drawing/2014/main" id="{3C9D3F52-E1BA-B42F-CF7D-2C54A262BFB9}"/>
+                <a16:creationId xmlns:a16="http://schemas.microsoft.com/office/drawing/2014/main" xmlns="" id="{3C9D3F52-E1BA-B42F-CF7D-2C54A262BFB9}"/>
               </a:ext>
             </a:extLst>
           </p:cNvPr>
@@ -8334,7 +8304,7 @@
           <p:cNvPr id="24" name="ZoneTexte 23">
             <a:extLst>
               <a:ext uri="{FF2B5EF4-FFF2-40B4-BE49-F238E27FC236}">
-                <a16:creationId xmlns:a16="http://schemas.microsoft.com/office/drawing/2014/main" id="{7BDFE3A8-516A-719B-9836-7966508F83B9}"/>
+                <a16:creationId xmlns:a16="http://schemas.microsoft.com/office/drawing/2014/main" xmlns="" id="{7BDFE3A8-516A-719B-9836-7966508F83B9}"/>
               </a:ext>
             </a:extLst>
           </p:cNvPr>
@@ -8369,7 +8339,7 @@
           <p:cNvPr id="25" name="ZoneTexte 24">
             <a:extLst>
               <a:ext uri="{FF2B5EF4-FFF2-40B4-BE49-F238E27FC236}">
-                <a16:creationId xmlns:a16="http://schemas.microsoft.com/office/drawing/2014/main" id="{83913704-F055-41D9-4440-C55B75D5144C}"/>
+                <a16:creationId xmlns:a16="http://schemas.microsoft.com/office/drawing/2014/main" xmlns="" id="{83913704-F055-41D9-4440-C55B75D5144C}"/>
               </a:ext>
             </a:extLst>
           </p:cNvPr>
@@ -8404,7 +8374,7 @@
           <p:cNvPr id="28" name="ZoneTexte 27">
             <a:extLst>
               <a:ext uri="{FF2B5EF4-FFF2-40B4-BE49-F238E27FC236}">
-                <a16:creationId xmlns:a16="http://schemas.microsoft.com/office/drawing/2014/main" id="{6F4D2A82-CA7C-D137-200C-91B9E50DB9C5}"/>
+                <a16:creationId xmlns:a16="http://schemas.microsoft.com/office/drawing/2014/main" xmlns="" id="{6F4D2A82-CA7C-D137-200C-91B9E50DB9C5}"/>
               </a:ext>
             </a:extLst>
           </p:cNvPr>
@@ -8448,7 +8418,7 @@
           <p:cNvPr id="16" name="ZoneTexte 15">
             <a:extLst>
               <a:ext uri="{FF2B5EF4-FFF2-40B4-BE49-F238E27FC236}">
-                <a16:creationId xmlns:a16="http://schemas.microsoft.com/office/drawing/2014/main" id="{2628BA60-A8EC-4AA1-00CA-85A39DAE9194}"/>
+                <a16:creationId xmlns:a16="http://schemas.microsoft.com/office/drawing/2014/main" xmlns="" id="{2628BA60-A8EC-4AA1-00CA-85A39DAE9194}"/>
               </a:ext>
             </a:extLst>
           </p:cNvPr>
@@ -8514,6 +8484,10 @@
               <a:rPr lang="fr-FR" sz="1400" dirty="0"/>
               <a:t> à </a:t>
             </a:r>
+            <a:r>
+              <a:rPr lang="fr-FR" sz="1600" dirty="0"/>
+              <a:t/>
+            </a:r>
             <a:br>
               <a:rPr lang="fr-FR" sz="1600" dirty="0"/>
             </a:br>
@@ -8525,6 +8499,10 @@
               <a:rPr lang="fr-FR" dirty="0"/>
               <a:t> </a:t>
             </a:r>
+            <a:r>
+              <a:rPr lang="fr-FR" sz="1600" dirty="0"/>
+              <a:t/>
+            </a:r>
             <a:br>
               <a:rPr lang="fr-FR" sz="1600" dirty="0"/>
             </a:br>
@@ -8557,6 +8535,10 @@
               <a:rPr lang="fr-FR" b="1" dirty="0"/>
               <a:t>repérer de façon explicite les erreurs </a:t>
             </a:r>
+            <a:r>
+              <a:rPr lang="fr-FR" sz="1600" dirty="0"/>
+              <a:t/>
+            </a:r>
             <a:br>
               <a:rPr lang="fr-FR" sz="1600" dirty="0"/>
             </a:br>
@@ -8573,7 +8555,7 @@
           <p:cNvPr id="27" name="ZoneTexte 26">
             <a:extLst>
               <a:ext uri="{FF2B5EF4-FFF2-40B4-BE49-F238E27FC236}">
-                <a16:creationId xmlns:a16="http://schemas.microsoft.com/office/drawing/2014/main" id="{77201329-58DA-613B-87D6-838BFF5FC419}"/>
+                <a16:creationId xmlns:a16="http://schemas.microsoft.com/office/drawing/2014/main" xmlns="" id="{77201329-58DA-613B-87D6-838BFF5FC419}"/>
               </a:ext>
             </a:extLst>
           </p:cNvPr>
@@ -8648,7 +8630,7 @@
           <p:cNvPr id="29" name="Rectangle : coins arrondis 28">
             <a:extLst>
               <a:ext uri="{FF2B5EF4-FFF2-40B4-BE49-F238E27FC236}">
-                <a16:creationId xmlns:a16="http://schemas.microsoft.com/office/drawing/2014/main" id="{86DAA1EA-4AC5-8DDB-3DF5-D340B4C083DA}"/>
+                <a16:creationId xmlns:a16="http://schemas.microsoft.com/office/drawing/2014/main" xmlns="" id="{86DAA1EA-4AC5-8DDB-3DF5-D340B4C083DA}"/>
               </a:ext>
             </a:extLst>
           </p:cNvPr>
@@ -8703,7 +8685,7 @@
           <p:cNvPr id="30" name="Rectangle : coins arrondis 29">
             <a:extLst>
               <a:ext uri="{FF2B5EF4-FFF2-40B4-BE49-F238E27FC236}">
-                <a16:creationId xmlns:a16="http://schemas.microsoft.com/office/drawing/2014/main" id="{237980B8-414A-9B48-1996-2D348DCB3EDC}"/>
+                <a16:creationId xmlns:a16="http://schemas.microsoft.com/office/drawing/2014/main" xmlns="" id="{237980B8-414A-9B48-1996-2D348DCB3EDC}"/>
               </a:ext>
             </a:extLst>
           </p:cNvPr>
@@ -8771,6 +8753,36 @@
           </a:p>
         </p:txBody>
       </p:sp>
+      <p:pic>
+        <p:nvPicPr>
+          <p:cNvPr id="19" name="Image 18"/>
+          <p:cNvPicPr>
+            <a:picLocks noChangeAspect="1"/>
+          </p:cNvPicPr>
+          <p:nvPr/>
+        </p:nvPicPr>
+        <p:blipFill>
+          <a:blip r:embed="rId2">
+            <a:extLst>
+              <a:ext uri="{28A0092B-C50C-407E-A947-70E740481C1C}">
+                <a14:useLocalDpi xmlns:a14="http://schemas.microsoft.com/office/drawing/2010/main" val="0"/>
+              </a:ext>
+            </a:extLst>
+          </a:blip>
+          <a:stretch>
+            <a:fillRect/>
+          </a:stretch>
+        </p:blipFill>
+        <p:spPr>
+          <a:xfrm>
+            <a:off x="9643587" y="452685"/>
+            <a:ext cx="2050702" cy="842404"/>
+          </a:xfrm>
+          <a:prstGeom prst="rect">
+            <a:avLst/>
+          </a:prstGeom>
+        </p:spPr>
+      </p:pic>
     </p:spTree>
     <p:extLst>
       <p:ext uri="{BB962C8B-B14F-4D97-AF65-F5344CB8AC3E}">
@@ -8806,7 +8818,7 @@
           <p:cNvPr id="3" name="Rectangle 2">
             <a:extLst>
               <a:ext uri="{FF2B5EF4-FFF2-40B4-BE49-F238E27FC236}">
-                <a16:creationId xmlns:a16="http://schemas.microsoft.com/office/drawing/2014/main" id="{69EEE2CD-304C-7206-E015-F52A5695E8DF}"/>
+                <a16:creationId xmlns:a16="http://schemas.microsoft.com/office/drawing/2014/main" xmlns="" id="{69EEE2CD-304C-7206-E015-F52A5695E8DF}"/>
               </a:ext>
             </a:extLst>
           </p:cNvPr>
@@ -8869,7 +8881,7 @@
           <p:cNvPr id="2" name="Titre 1">
             <a:extLst>
               <a:ext uri="{FF2B5EF4-FFF2-40B4-BE49-F238E27FC236}">
-                <a16:creationId xmlns:a16="http://schemas.microsoft.com/office/drawing/2014/main" id="{97F71108-8121-4CC2-3ED6-50ABC11E79C5}"/>
+                <a16:creationId xmlns:a16="http://schemas.microsoft.com/office/drawing/2014/main" xmlns="" id="{97F71108-8121-4CC2-3ED6-50ABC11E79C5}"/>
               </a:ext>
             </a:extLst>
           </p:cNvPr>
@@ -8923,7 +8935,7 @@
           <p:cNvPr id="7" name="Rectangle 6">
             <a:extLst>
               <a:ext uri="{FF2B5EF4-FFF2-40B4-BE49-F238E27FC236}">
-                <a16:creationId xmlns:a16="http://schemas.microsoft.com/office/drawing/2014/main" id="{E97ACAFF-7D28-E79D-9EB4-4FEEF5BB9613}"/>
+                <a16:creationId xmlns:a16="http://schemas.microsoft.com/office/drawing/2014/main" xmlns="" id="{E97ACAFF-7D28-E79D-9EB4-4FEEF5BB9613}"/>
               </a:ext>
             </a:extLst>
           </p:cNvPr>
@@ -8970,48 +8982,12 @@
           </a:p>
         </p:txBody>
       </p:sp>
-      <p:pic>
-        <p:nvPicPr>
-          <p:cNvPr id="4" name="Image 3" descr="Une image contenant texte&#10;&#10;Description générée automatiquement">
-            <a:extLst>
-              <a:ext uri="{FF2B5EF4-FFF2-40B4-BE49-F238E27FC236}">
-                <a16:creationId xmlns:a16="http://schemas.microsoft.com/office/drawing/2014/main" id="{9BFF7F1D-2708-E366-DB38-F68C1FBD99DC}"/>
-              </a:ext>
-            </a:extLst>
-          </p:cNvPr>
-          <p:cNvPicPr>
-            <a:picLocks noChangeAspect="1"/>
-          </p:cNvPicPr>
-          <p:nvPr/>
-        </p:nvPicPr>
-        <p:blipFill>
-          <a:blip r:embed="rId2" cstate="print">
-            <a:extLst>
-              <a:ext uri="{28A0092B-C50C-407E-A947-70E740481C1C}">
-                <a14:useLocalDpi xmlns:a14="http://schemas.microsoft.com/office/drawing/2010/main" val="0"/>
-              </a:ext>
-            </a:extLst>
-          </a:blip>
-          <a:stretch>
-            <a:fillRect/>
-          </a:stretch>
-        </p:blipFill>
-        <p:spPr>
-          <a:xfrm>
-            <a:off x="9808481" y="509288"/>
-            <a:ext cx="1825291" cy="749808"/>
-          </a:xfrm>
-          <a:prstGeom prst="rect">
-            <a:avLst/>
-          </a:prstGeom>
-        </p:spPr>
-      </p:pic>
       <p:sp>
         <p:nvSpPr>
           <p:cNvPr id="49" name="ZoneTexte 48">
             <a:extLst>
               <a:ext uri="{FF2B5EF4-FFF2-40B4-BE49-F238E27FC236}">
-                <a16:creationId xmlns:a16="http://schemas.microsoft.com/office/drawing/2014/main" id="{0D3C9DC1-6176-93E4-0236-C834BE8949CB}"/>
+                <a16:creationId xmlns:a16="http://schemas.microsoft.com/office/drawing/2014/main" xmlns="" id="{0D3C9DC1-6176-93E4-0236-C834BE8949CB}"/>
               </a:ext>
             </a:extLst>
           </p:cNvPr>
@@ -9050,7 +9026,7 @@
           <p:cNvPr id="8" name="Triangle isocèle 7">
             <a:extLst>
               <a:ext uri="{FF2B5EF4-FFF2-40B4-BE49-F238E27FC236}">
-                <a16:creationId xmlns:a16="http://schemas.microsoft.com/office/drawing/2014/main" id="{ABA8BA54-B2C6-AF33-9B9D-2B2E3C4CDF4D}"/>
+                <a16:creationId xmlns:a16="http://schemas.microsoft.com/office/drawing/2014/main" xmlns="" id="{ABA8BA54-B2C6-AF33-9B9D-2B2E3C4CDF4D}"/>
               </a:ext>
             </a:extLst>
           </p:cNvPr>
@@ -9112,7 +9088,7 @@
           <p:cNvPr id="9" name="ZoneTexte 8">
             <a:extLst>
               <a:ext uri="{FF2B5EF4-FFF2-40B4-BE49-F238E27FC236}">
-                <a16:creationId xmlns:a16="http://schemas.microsoft.com/office/drawing/2014/main" id="{CB5A13C3-E4AA-292F-E183-6A505B516243}"/>
+                <a16:creationId xmlns:a16="http://schemas.microsoft.com/office/drawing/2014/main" xmlns="" id="{CB5A13C3-E4AA-292F-E183-6A505B516243}"/>
               </a:ext>
             </a:extLst>
           </p:cNvPr>
@@ -9201,7 +9177,7 @@
           <p:cNvPr id="12" name="Flèche : pentagone 11">
             <a:extLst>
               <a:ext uri="{FF2B5EF4-FFF2-40B4-BE49-F238E27FC236}">
-                <a16:creationId xmlns:a16="http://schemas.microsoft.com/office/drawing/2014/main" id="{4BFD9744-0876-5047-18DF-17BB5AA72CFD}"/>
+                <a16:creationId xmlns:a16="http://schemas.microsoft.com/office/drawing/2014/main" xmlns="" id="{4BFD9744-0876-5047-18DF-17BB5AA72CFD}"/>
               </a:ext>
             </a:extLst>
           </p:cNvPr>
@@ -9253,7 +9229,7 @@
           <p:cNvPr id="14" name="Flèche : pentagone 13">
             <a:extLst>
               <a:ext uri="{FF2B5EF4-FFF2-40B4-BE49-F238E27FC236}">
-                <a16:creationId xmlns:a16="http://schemas.microsoft.com/office/drawing/2014/main" id="{862561DF-5E53-4B2F-2083-D2A26DEB7A9C}"/>
+                <a16:creationId xmlns:a16="http://schemas.microsoft.com/office/drawing/2014/main" xmlns="" id="{862561DF-5E53-4B2F-2083-D2A26DEB7A9C}"/>
               </a:ext>
             </a:extLst>
           </p:cNvPr>
@@ -9305,7 +9281,7 @@
           <p:cNvPr id="23" name="ZoneTexte 22">
             <a:extLst>
               <a:ext uri="{FF2B5EF4-FFF2-40B4-BE49-F238E27FC236}">
-                <a16:creationId xmlns:a16="http://schemas.microsoft.com/office/drawing/2014/main" id="{3C9D3F52-E1BA-B42F-CF7D-2C54A262BFB9}"/>
+                <a16:creationId xmlns:a16="http://schemas.microsoft.com/office/drawing/2014/main" xmlns="" id="{3C9D3F52-E1BA-B42F-CF7D-2C54A262BFB9}"/>
               </a:ext>
             </a:extLst>
           </p:cNvPr>
@@ -9340,7 +9316,7 @@
           <p:cNvPr id="24" name="ZoneTexte 23">
             <a:extLst>
               <a:ext uri="{FF2B5EF4-FFF2-40B4-BE49-F238E27FC236}">
-                <a16:creationId xmlns:a16="http://schemas.microsoft.com/office/drawing/2014/main" id="{7BDFE3A8-516A-719B-9836-7966508F83B9}"/>
+                <a16:creationId xmlns:a16="http://schemas.microsoft.com/office/drawing/2014/main" xmlns="" id="{7BDFE3A8-516A-719B-9836-7966508F83B9}"/>
               </a:ext>
             </a:extLst>
           </p:cNvPr>
@@ -9375,7 +9351,7 @@
           <p:cNvPr id="10" name="ZoneTexte 9">
             <a:extLst>
               <a:ext uri="{FF2B5EF4-FFF2-40B4-BE49-F238E27FC236}">
-                <a16:creationId xmlns:a16="http://schemas.microsoft.com/office/drawing/2014/main" id="{24347B33-9E6D-CA2C-C405-1F1F49326184}"/>
+                <a16:creationId xmlns:a16="http://schemas.microsoft.com/office/drawing/2014/main" xmlns="" id="{24347B33-9E6D-CA2C-C405-1F1F49326184}"/>
               </a:ext>
             </a:extLst>
           </p:cNvPr>
@@ -9426,7 +9402,7 @@
           <p:cNvPr id="11" name="Rectangle 10">
             <a:extLst>
               <a:ext uri="{FF2B5EF4-FFF2-40B4-BE49-F238E27FC236}">
-                <a16:creationId xmlns:a16="http://schemas.microsoft.com/office/drawing/2014/main" id="{7725D4FA-47CC-696E-1C6A-AD6B24FCD8F8}"/>
+                <a16:creationId xmlns:a16="http://schemas.microsoft.com/office/drawing/2014/main" xmlns="" id="{7725D4FA-47CC-696E-1C6A-AD6B24FCD8F8}"/>
               </a:ext>
             </a:extLst>
           </p:cNvPr>
@@ -9481,7 +9457,7 @@
           <p:cNvPr id="15" name="ZoneTexte 14">
             <a:extLst>
               <a:ext uri="{FF2B5EF4-FFF2-40B4-BE49-F238E27FC236}">
-                <a16:creationId xmlns:a16="http://schemas.microsoft.com/office/drawing/2014/main" id="{923462BA-E8A0-D3C0-9722-1B7BCD561485}"/>
+                <a16:creationId xmlns:a16="http://schemas.microsoft.com/office/drawing/2014/main" xmlns="" id="{923462BA-E8A0-D3C0-9722-1B7BCD561485}"/>
               </a:ext>
             </a:extLst>
           </p:cNvPr>
@@ -9520,7 +9496,7 @@
           <p:cNvPr id="17" name="ZoneTexte 16">
             <a:extLst>
               <a:ext uri="{FF2B5EF4-FFF2-40B4-BE49-F238E27FC236}">
-                <a16:creationId xmlns:a16="http://schemas.microsoft.com/office/drawing/2014/main" id="{12CA0C4C-24DC-C940-BCE0-4FBE38E80D4F}"/>
+                <a16:creationId xmlns:a16="http://schemas.microsoft.com/office/drawing/2014/main" xmlns="" id="{12CA0C4C-24DC-C940-BCE0-4FBE38E80D4F}"/>
               </a:ext>
             </a:extLst>
           </p:cNvPr>
@@ -9564,7 +9540,7 @@
           <p:cNvPr id="5" name="ZoneTexte 4">
             <a:extLst>
               <a:ext uri="{FF2B5EF4-FFF2-40B4-BE49-F238E27FC236}">
-                <a16:creationId xmlns:a16="http://schemas.microsoft.com/office/drawing/2014/main" id="{99E0D320-27B1-2881-C88A-4FAF3A582B44}"/>
+                <a16:creationId xmlns:a16="http://schemas.microsoft.com/office/drawing/2014/main" xmlns="" id="{99E0D320-27B1-2881-C88A-4FAF3A582B44}"/>
               </a:ext>
             </a:extLst>
           </p:cNvPr>
@@ -9600,7 +9576,7 @@
           <p:cNvPr id="18" name="Rectangle 17">
             <a:extLst>
               <a:ext uri="{FF2B5EF4-FFF2-40B4-BE49-F238E27FC236}">
-                <a16:creationId xmlns:a16="http://schemas.microsoft.com/office/drawing/2014/main" id="{A7CBEDD8-B7C6-A06C-9A4C-6CDC26EE0CA9}"/>
+                <a16:creationId xmlns:a16="http://schemas.microsoft.com/office/drawing/2014/main" xmlns="" id="{A7CBEDD8-B7C6-A06C-9A4C-6CDC26EE0CA9}"/>
               </a:ext>
             </a:extLst>
           </p:cNvPr>
@@ -9655,7 +9631,7 @@
           <p:cNvPr id="20" name="Rectangle 19">
             <a:extLst>
               <a:ext uri="{FF2B5EF4-FFF2-40B4-BE49-F238E27FC236}">
-                <a16:creationId xmlns:a16="http://schemas.microsoft.com/office/drawing/2014/main" id="{B3132CA9-7C9C-77BB-9BB0-003B765DA2D8}"/>
+                <a16:creationId xmlns:a16="http://schemas.microsoft.com/office/drawing/2014/main" xmlns="" id="{B3132CA9-7C9C-77BB-9BB0-003B765DA2D8}"/>
               </a:ext>
             </a:extLst>
           </p:cNvPr>
@@ -9710,7 +9686,7 @@
           <p:cNvPr id="26" name="Rectangle 25">
             <a:extLst>
               <a:ext uri="{FF2B5EF4-FFF2-40B4-BE49-F238E27FC236}">
-                <a16:creationId xmlns:a16="http://schemas.microsoft.com/office/drawing/2014/main" id="{386AAE56-B1FA-1500-D223-06F9119EF02E}"/>
+                <a16:creationId xmlns:a16="http://schemas.microsoft.com/office/drawing/2014/main" xmlns="" id="{386AAE56-B1FA-1500-D223-06F9119EF02E}"/>
               </a:ext>
             </a:extLst>
           </p:cNvPr>
@@ -9765,7 +9741,7 @@
           <p:cNvPr id="28" name="ZoneTexte 27">
             <a:extLst>
               <a:ext uri="{FF2B5EF4-FFF2-40B4-BE49-F238E27FC236}">
-                <a16:creationId xmlns:a16="http://schemas.microsoft.com/office/drawing/2014/main" id="{6F4D2A82-CA7C-D137-200C-91B9E50DB9C5}"/>
+                <a16:creationId xmlns:a16="http://schemas.microsoft.com/office/drawing/2014/main" xmlns="" id="{6F4D2A82-CA7C-D137-200C-91B9E50DB9C5}"/>
               </a:ext>
             </a:extLst>
           </p:cNvPr>
@@ -9809,7 +9785,7 @@
           <p:cNvPr id="6" name="Flèche : pentagone 5">
             <a:extLst>
               <a:ext uri="{FF2B5EF4-FFF2-40B4-BE49-F238E27FC236}">
-                <a16:creationId xmlns:a16="http://schemas.microsoft.com/office/drawing/2014/main" id="{F1F31EA0-5A9F-854B-0EC1-704BF008075E}"/>
+                <a16:creationId xmlns:a16="http://schemas.microsoft.com/office/drawing/2014/main" xmlns="" id="{F1F31EA0-5A9F-854B-0EC1-704BF008075E}"/>
               </a:ext>
             </a:extLst>
           </p:cNvPr>
@@ -9861,7 +9837,7 @@
           <p:cNvPr id="16" name="ZoneTexte 15">
             <a:extLst>
               <a:ext uri="{FF2B5EF4-FFF2-40B4-BE49-F238E27FC236}">
-                <a16:creationId xmlns:a16="http://schemas.microsoft.com/office/drawing/2014/main" id="{1F620E63-2A6E-A82A-1371-5A6D9C56B9C3}"/>
+                <a16:creationId xmlns:a16="http://schemas.microsoft.com/office/drawing/2014/main" xmlns="" id="{1F620E63-2A6E-A82A-1371-5A6D9C56B9C3}"/>
               </a:ext>
             </a:extLst>
           </p:cNvPr>
@@ -9896,7 +9872,7 @@
           <p:cNvPr id="19" name="Rectangle 18">
             <a:extLst>
               <a:ext uri="{FF2B5EF4-FFF2-40B4-BE49-F238E27FC236}">
-                <a16:creationId xmlns:a16="http://schemas.microsoft.com/office/drawing/2014/main" id="{DB86F53F-C290-2366-6D07-BD0AD9140140}"/>
+                <a16:creationId xmlns:a16="http://schemas.microsoft.com/office/drawing/2014/main" xmlns="" id="{DB86F53F-C290-2366-6D07-BD0AD9140140}"/>
               </a:ext>
             </a:extLst>
           </p:cNvPr>
@@ -9948,7 +9924,7 @@
           <p:cNvPr id="27" name="ZoneTexte 26">
             <a:extLst>
               <a:ext uri="{FF2B5EF4-FFF2-40B4-BE49-F238E27FC236}">
-                <a16:creationId xmlns:a16="http://schemas.microsoft.com/office/drawing/2014/main" id="{465BA28B-4862-56EB-AC6C-0BB81190BE7A}"/>
+                <a16:creationId xmlns:a16="http://schemas.microsoft.com/office/drawing/2014/main" xmlns="" id="{465BA28B-4862-56EB-AC6C-0BB81190BE7A}"/>
               </a:ext>
             </a:extLst>
           </p:cNvPr>
@@ -9983,7 +9959,7 @@
           <p:cNvPr id="13" name="Rectangle : coins arrondis 12">
             <a:extLst>
               <a:ext uri="{FF2B5EF4-FFF2-40B4-BE49-F238E27FC236}">
-                <a16:creationId xmlns:a16="http://schemas.microsoft.com/office/drawing/2014/main" id="{D7A7DF3E-2BB9-FB41-E59B-DF9B319E7F15}"/>
+                <a16:creationId xmlns:a16="http://schemas.microsoft.com/office/drawing/2014/main" xmlns="" id="{D7A7DF3E-2BB9-FB41-E59B-DF9B319E7F15}"/>
               </a:ext>
             </a:extLst>
           </p:cNvPr>
@@ -10051,6 +10027,36 @@
           </a:p>
         </p:txBody>
       </p:sp>
+      <p:pic>
+        <p:nvPicPr>
+          <p:cNvPr id="29" name="Image 28"/>
+          <p:cNvPicPr>
+            <a:picLocks noChangeAspect="1"/>
+          </p:cNvPicPr>
+          <p:nvPr/>
+        </p:nvPicPr>
+        <p:blipFill>
+          <a:blip r:embed="rId2">
+            <a:extLst>
+              <a:ext uri="{28A0092B-C50C-407E-A947-70E740481C1C}">
+                <a14:useLocalDpi xmlns:a14="http://schemas.microsoft.com/office/drawing/2010/main" val="0"/>
+              </a:ext>
+            </a:extLst>
+          </a:blip>
+          <a:stretch>
+            <a:fillRect/>
+          </a:stretch>
+        </p:blipFill>
+        <p:spPr>
+          <a:xfrm>
+            <a:off x="9643587" y="452685"/>
+            <a:ext cx="2050702" cy="842404"/>
+          </a:xfrm>
+          <a:prstGeom prst="rect">
+            <a:avLst/>
+          </a:prstGeom>
+        </p:spPr>
+      </p:pic>
     </p:spTree>
     <p:extLst>
       <p:ext uri="{BB962C8B-B14F-4D97-AF65-F5344CB8AC3E}">
@@ -10086,7 +10092,7 @@
           <p:cNvPr id="3" name="Rectangle 2">
             <a:extLst>
               <a:ext uri="{FF2B5EF4-FFF2-40B4-BE49-F238E27FC236}">
-                <a16:creationId xmlns:a16="http://schemas.microsoft.com/office/drawing/2014/main" id="{69EEE2CD-304C-7206-E015-F52A5695E8DF}"/>
+                <a16:creationId xmlns:a16="http://schemas.microsoft.com/office/drawing/2014/main" xmlns="" id="{69EEE2CD-304C-7206-E015-F52A5695E8DF}"/>
               </a:ext>
             </a:extLst>
           </p:cNvPr>
@@ -10149,7 +10155,7 @@
           <p:cNvPr id="2" name="Titre 1">
             <a:extLst>
               <a:ext uri="{FF2B5EF4-FFF2-40B4-BE49-F238E27FC236}">
-                <a16:creationId xmlns:a16="http://schemas.microsoft.com/office/drawing/2014/main" id="{97F71108-8121-4CC2-3ED6-50ABC11E79C5}"/>
+                <a16:creationId xmlns:a16="http://schemas.microsoft.com/office/drawing/2014/main" xmlns="" id="{97F71108-8121-4CC2-3ED6-50ABC11E79C5}"/>
               </a:ext>
             </a:extLst>
           </p:cNvPr>
@@ -10208,7 +10214,7 @@
           <p:cNvPr id="7" name="Rectangle 6">
             <a:extLst>
               <a:ext uri="{FF2B5EF4-FFF2-40B4-BE49-F238E27FC236}">
-                <a16:creationId xmlns:a16="http://schemas.microsoft.com/office/drawing/2014/main" id="{E97ACAFF-7D28-E79D-9EB4-4FEEF5BB9613}"/>
+                <a16:creationId xmlns:a16="http://schemas.microsoft.com/office/drawing/2014/main" xmlns="" id="{E97ACAFF-7D28-E79D-9EB4-4FEEF5BB9613}"/>
               </a:ext>
             </a:extLst>
           </p:cNvPr>
@@ -10255,48 +10261,12 @@
           </a:p>
         </p:txBody>
       </p:sp>
-      <p:pic>
-        <p:nvPicPr>
-          <p:cNvPr id="4" name="Image 3" descr="Une image contenant texte&#10;&#10;Description générée automatiquement">
-            <a:extLst>
-              <a:ext uri="{FF2B5EF4-FFF2-40B4-BE49-F238E27FC236}">
-                <a16:creationId xmlns:a16="http://schemas.microsoft.com/office/drawing/2014/main" id="{9BFF7F1D-2708-E366-DB38-F68C1FBD99DC}"/>
-              </a:ext>
-            </a:extLst>
-          </p:cNvPr>
-          <p:cNvPicPr>
-            <a:picLocks noChangeAspect="1"/>
-          </p:cNvPicPr>
-          <p:nvPr/>
-        </p:nvPicPr>
-        <p:blipFill>
-          <a:blip r:embed="rId3" cstate="print">
-            <a:extLst>
-              <a:ext uri="{28A0092B-C50C-407E-A947-70E740481C1C}">
-                <a14:useLocalDpi xmlns:a14="http://schemas.microsoft.com/office/drawing/2010/main" val="0"/>
-              </a:ext>
-            </a:extLst>
-          </a:blip>
-          <a:stretch>
-            <a:fillRect/>
-          </a:stretch>
-        </p:blipFill>
-        <p:spPr>
-          <a:xfrm>
-            <a:off x="9808481" y="509288"/>
-            <a:ext cx="1825291" cy="749808"/>
-          </a:xfrm>
-          <a:prstGeom prst="rect">
-            <a:avLst/>
-          </a:prstGeom>
-        </p:spPr>
-      </p:pic>
       <p:sp>
         <p:nvSpPr>
           <p:cNvPr id="8" name="Rectangle : coins arrondis 7">
             <a:extLst>
               <a:ext uri="{FF2B5EF4-FFF2-40B4-BE49-F238E27FC236}">
-                <a16:creationId xmlns:a16="http://schemas.microsoft.com/office/drawing/2014/main" id="{3831B6A5-6289-648D-2669-16CD74D6055A}"/>
+                <a16:creationId xmlns:a16="http://schemas.microsoft.com/office/drawing/2014/main" xmlns="" id="{3831B6A5-6289-648D-2669-16CD74D6055A}"/>
               </a:ext>
             </a:extLst>
           </p:cNvPr>
@@ -10347,7 +10317,7 @@
           <p:cNvPr id="9" name="Flèche : pentagone 8">
             <a:extLst>
               <a:ext uri="{FF2B5EF4-FFF2-40B4-BE49-F238E27FC236}">
-                <a16:creationId xmlns:a16="http://schemas.microsoft.com/office/drawing/2014/main" id="{28ADF0A4-E77B-DA03-EB3A-CFBDCE0AC872}"/>
+                <a16:creationId xmlns:a16="http://schemas.microsoft.com/office/drawing/2014/main" xmlns="" id="{28ADF0A4-E77B-DA03-EB3A-CFBDCE0AC872}"/>
               </a:ext>
             </a:extLst>
           </p:cNvPr>
@@ -10399,7 +10369,7 @@
           <p:cNvPr id="10" name="Flèche : pentagone 9">
             <a:extLst>
               <a:ext uri="{FF2B5EF4-FFF2-40B4-BE49-F238E27FC236}">
-                <a16:creationId xmlns:a16="http://schemas.microsoft.com/office/drawing/2014/main" id="{ACF27571-268A-478D-3B8F-50DB98195AE4}"/>
+                <a16:creationId xmlns:a16="http://schemas.microsoft.com/office/drawing/2014/main" xmlns="" id="{ACF27571-268A-478D-3B8F-50DB98195AE4}"/>
               </a:ext>
             </a:extLst>
           </p:cNvPr>
@@ -10451,7 +10421,7 @@
           <p:cNvPr id="11" name="Flèche : chevron 10">
             <a:extLst>
               <a:ext uri="{FF2B5EF4-FFF2-40B4-BE49-F238E27FC236}">
-                <a16:creationId xmlns:a16="http://schemas.microsoft.com/office/drawing/2014/main" id="{AA4B21F1-4161-655B-5767-E5C2B69D21BD}"/>
+                <a16:creationId xmlns:a16="http://schemas.microsoft.com/office/drawing/2014/main" xmlns="" id="{AA4B21F1-4161-655B-5767-E5C2B69D21BD}"/>
               </a:ext>
             </a:extLst>
           </p:cNvPr>
@@ -10507,7 +10477,7 @@
           <p:cNvPr id="12" name="Flèche : chevron 11">
             <a:extLst>
               <a:ext uri="{FF2B5EF4-FFF2-40B4-BE49-F238E27FC236}">
-                <a16:creationId xmlns:a16="http://schemas.microsoft.com/office/drawing/2014/main" id="{2B851135-06CF-594A-7450-17DA7231C110}"/>
+                <a16:creationId xmlns:a16="http://schemas.microsoft.com/office/drawing/2014/main" xmlns="" id="{2B851135-06CF-594A-7450-17DA7231C110}"/>
               </a:ext>
             </a:extLst>
           </p:cNvPr>
@@ -10563,7 +10533,7 @@
           <p:cNvPr id="13" name="Flèche : chevron 12">
             <a:extLst>
               <a:ext uri="{FF2B5EF4-FFF2-40B4-BE49-F238E27FC236}">
-                <a16:creationId xmlns:a16="http://schemas.microsoft.com/office/drawing/2014/main" id="{DC1BC409-5367-BFD5-A3BF-E35BF1856B9D}"/>
+                <a16:creationId xmlns:a16="http://schemas.microsoft.com/office/drawing/2014/main" xmlns="" id="{DC1BC409-5367-BFD5-A3BF-E35BF1856B9D}"/>
               </a:ext>
             </a:extLst>
           </p:cNvPr>
@@ -10619,7 +10589,7 @@
           <p:cNvPr id="30" name="ZoneTexte 29">
             <a:extLst>
               <a:ext uri="{FF2B5EF4-FFF2-40B4-BE49-F238E27FC236}">
-                <a16:creationId xmlns:a16="http://schemas.microsoft.com/office/drawing/2014/main" id="{39864482-9753-290A-3835-55F6858709FA}"/>
+                <a16:creationId xmlns:a16="http://schemas.microsoft.com/office/drawing/2014/main" xmlns="" id="{39864482-9753-290A-3835-55F6858709FA}"/>
               </a:ext>
             </a:extLst>
           </p:cNvPr>
@@ -10654,7 +10624,7 @@
           <p:cNvPr id="44" name="ZoneTexte 43">
             <a:extLst>
               <a:ext uri="{FF2B5EF4-FFF2-40B4-BE49-F238E27FC236}">
-                <a16:creationId xmlns:a16="http://schemas.microsoft.com/office/drawing/2014/main" id="{BCFB3284-2C30-3921-B88B-1AF38A707C71}"/>
+                <a16:creationId xmlns:a16="http://schemas.microsoft.com/office/drawing/2014/main" xmlns="" id="{BCFB3284-2C30-3921-B88B-1AF38A707C71}"/>
               </a:ext>
             </a:extLst>
           </p:cNvPr>
@@ -10693,7 +10663,7 @@
           <p:cNvPr id="45" name="ZoneTexte 44">
             <a:extLst>
               <a:ext uri="{FF2B5EF4-FFF2-40B4-BE49-F238E27FC236}">
-                <a16:creationId xmlns:a16="http://schemas.microsoft.com/office/drawing/2014/main" id="{37368C82-75E3-A542-2D81-1A0BF6062A6C}"/>
+                <a16:creationId xmlns:a16="http://schemas.microsoft.com/office/drawing/2014/main" xmlns="" id="{37368C82-75E3-A542-2D81-1A0BF6062A6C}"/>
               </a:ext>
             </a:extLst>
           </p:cNvPr>
@@ -10732,7 +10702,7 @@
           <p:cNvPr id="50" name="ZoneTexte 49">
             <a:extLst>
               <a:ext uri="{FF2B5EF4-FFF2-40B4-BE49-F238E27FC236}">
-                <a16:creationId xmlns:a16="http://schemas.microsoft.com/office/drawing/2014/main" id="{49486859-C02B-5896-180E-13B456B499CB}"/>
+                <a16:creationId xmlns:a16="http://schemas.microsoft.com/office/drawing/2014/main" xmlns="" id="{49486859-C02B-5896-180E-13B456B499CB}"/>
               </a:ext>
             </a:extLst>
           </p:cNvPr>
@@ -10771,7 +10741,7 @@
           <p:cNvPr id="51" name="ZoneTexte 50">
             <a:extLst>
               <a:ext uri="{FF2B5EF4-FFF2-40B4-BE49-F238E27FC236}">
-                <a16:creationId xmlns:a16="http://schemas.microsoft.com/office/drawing/2014/main" id="{D427008F-58E6-4057-4D4E-F9D3B8AE3B8A}"/>
+                <a16:creationId xmlns:a16="http://schemas.microsoft.com/office/drawing/2014/main" xmlns="" id="{D427008F-58E6-4057-4D4E-F9D3B8AE3B8A}"/>
               </a:ext>
             </a:extLst>
           </p:cNvPr>
@@ -10810,7 +10780,148 @@
           <p:cNvPr id="6" name="Image 5">
             <a:extLst>
               <a:ext uri="{FF2B5EF4-FFF2-40B4-BE49-F238E27FC236}">
-                <a16:creationId xmlns:a16="http://schemas.microsoft.com/office/drawing/2014/main" id="{080B1FE2-421C-C3F3-8759-5747F26B6090}"/>
+                <a16:creationId xmlns:a16="http://schemas.microsoft.com/office/drawing/2014/main" xmlns="" id="{080B1FE2-421C-C3F3-8759-5747F26B6090}"/>
+              </a:ext>
+            </a:extLst>
+          </p:cNvPr>
+          <p:cNvPicPr>
+            <a:picLocks noChangeAspect="1"/>
+          </p:cNvPicPr>
+          <p:nvPr/>
+        </p:nvPicPr>
+        <p:blipFill>
+          <a:blip r:embed="rId3"/>
+          <a:stretch>
+            <a:fillRect/>
+          </a:stretch>
+        </p:blipFill>
+        <p:spPr>
+          <a:xfrm>
+            <a:off x="6891336" y="4546385"/>
+            <a:ext cx="1562434" cy="1388830"/>
+          </a:xfrm>
+          <a:prstGeom prst="rect">
+            <a:avLst/>
+          </a:prstGeom>
+        </p:spPr>
+      </p:pic>
+      <p:cxnSp>
+        <p:nvCxnSpPr>
+          <p:cNvPr id="16" name="Connecteur : en arc 15">
+            <a:extLst>
+              <a:ext uri="{FF2B5EF4-FFF2-40B4-BE49-F238E27FC236}">
+                <a16:creationId xmlns:a16="http://schemas.microsoft.com/office/drawing/2014/main" xmlns="" id="{1B56CF65-8D49-354F-2607-F55BD67DA5DC}"/>
+              </a:ext>
+            </a:extLst>
+          </p:cNvPr>
+          <p:cNvCxnSpPr>
+            <a:cxnSpLocks/>
+          </p:cNvCxnSpPr>
+          <p:nvPr/>
+        </p:nvCxnSpPr>
+        <p:spPr>
+          <a:xfrm flipV="1">
+            <a:off x="4998436" y="5082876"/>
+            <a:ext cx="1349785" cy="320040"/>
+          </a:xfrm>
+          <a:prstGeom prst="curvedConnector3">
+            <a:avLst>
+              <a:gd name="adj1" fmla="val 50000"/>
+            </a:avLst>
+          </a:prstGeom>
+          <a:ln w="76200">
+            <a:solidFill>
+              <a:srgbClr val="002060"/>
+            </a:solidFill>
+            <a:tailEnd type="triangle"/>
+          </a:ln>
+        </p:spPr>
+        <p:style>
+          <a:lnRef idx="1">
+            <a:schemeClr val="accent1"/>
+          </a:lnRef>
+          <a:fillRef idx="0">
+            <a:schemeClr val="accent1"/>
+          </a:fillRef>
+          <a:effectRef idx="0">
+            <a:schemeClr val="accent1"/>
+          </a:effectRef>
+          <a:fontRef idx="minor">
+            <a:schemeClr val="tx1"/>
+          </a:fontRef>
+        </p:style>
+      </p:cxnSp>
+      <p:sp>
+        <p:nvSpPr>
+          <p:cNvPr id="19" name="ZoneTexte 18">
+            <a:extLst>
+              <a:ext uri="{FF2B5EF4-FFF2-40B4-BE49-F238E27FC236}">
+                <a16:creationId xmlns:a16="http://schemas.microsoft.com/office/drawing/2014/main" xmlns="" id="{362C3312-9CD4-773B-546E-C01121CB6607}"/>
+              </a:ext>
+            </a:extLst>
+          </p:cNvPr>
+          <p:cNvSpPr txBox="1"/>
+          <p:nvPr/>
+        </p:nvSpPr>
+        <p:spPr>
+          <a:xfrm>
+            <a:off x="375547" y="6550223"/>
+            <a:ext cx="4649734" cy="200055"/>
+          </a:xfrm>
+          <a:prstGeom prst="rect">
+            <a:avLst/>
+          </a:prstGeom>
+          <a:noFill/>
+        </p:spPr>
+        <p:txBody>
+          <a:bodyPr wrap="square">
+            <a:spAutoFit/>
+          </a:bodyPr>
+          <a:lstStyle/>
+          <a:p>
+            <a:pPr marR="0"/>
+            <a:r>
+              <a:rPr lang="fr-FR" sz="700" dirty="0">
+                <a:solidFill>
+                  <a:prstClr val="black"/>
+                </a:solidFill>
+                <a:latin typeface="Liberation Sans" panose="020B0604020202020204" pitchFamily="34" charset="0"/>
+              </a:rPr>
+              <a:t>Images : </a:t>
+            </a:r>
+            <a:r>
+              <a:rPr lang="fr-FR" sz="700" dirty="0" err="1">
+                <a:solidFill>
+                  <a:prstClr val="black"/>
+                </a:solidFill>
+                <a:latin typeface="Liberation Sans" panose="020B0604020202020204" pitchFamily="34" charset="0"/>
+              </a:rPr>
+              <a:t>Radiospares</a:t>
+            </a:r>
+            <a:r>
+              <a:rPr lang="fr-FR" sz="700" dirty="0">
+                <a:solidFill>
+                  <a:prstClr val="black"/>
+                </a:solidFill>
+                <a:latin typeface="Liberation Sans" panose="020B0604020202020204" pitchFamily="34" charset="0"/>
+              </a:rPr>
+              <a:t> / rs-online.com</a:t>
+            </a:r>
+            <a:endParaRPr lang="fr-FR" sz="1000" b="0" i="0" u="none" strike="noStrike" dirty="0">
+              <a:solidFill>
+                <a:prstClr val="black"/>
+              </a:solidFill>
+              <a:latin typeface="FreeSans"/>
+            </a:endParaRPr>
+          </a:p>
+        </p:txBody>
+      </p:sp>
+      <p:pic>
+        <p:nvPicPr>
+          <p:cNvPr id="21" name="Image 20">
+            <a:extLst>
+              <a:ext uri="{FF2B5EF4-FFF2-40B4-BE49-F238E27FC236}">
+                <a16:creationId xmlns:a16="http://schemas.microsoft.com/office/drawing/2014/main" xmlns="" id="{D289D4E5-09E8-AD42-73C0-C8471D6E7F79}"/>
               </a:ext>
             </a:extLst>
           </p:cNvPr>
@@ -10827,147 +10938,6 @@
         </p:blipFill>
         <p:spPr>
           <a:xfrm>
-            <a:off x="6891336" y="4546385"/>
-            <a:ext cx="1562434" cy="1388830"/>
-          </a:xfrm>
-          <a:prstGeom prst="rect">
-            <a:avLst/>
-          </a:prstGeom>
-        </p:spPr>
-      </p:pic>
-      <p:cxnSp>
-        <p:nvCxnSpPr>
-          <p:cNvPr id="16" name="Connecteur : en arc 15">
-            <a:extLst>
-              <a:ext uri="{FF2B5EF4-FFF2-40B4-BE49-F238E27FC236}">
-                <a16:creationId xmlns:a16="http://schemas.microsoft.com/office/drawing/2014/main" id="{1B56CF65-8D49-354F-2607-F55BD67DA5DC}"/>
-              </a:ext>
-            </a:extLst>
-          </p:cNvPr>
-          <p:cNvCxnSpPr>
-            <a:cxnSpLocks/>
-          </p:cNvCxnSpPr>
-          <p:nvPr/>
-        </p:nvCxnSpPr>
-        <p:spPr>
-          <a:xfrm flipV="1">
-            <a:off x="4998436" y="5082876"/>
-            <a:ext cx="1349785" cy="320040"/>
-          </a:xfrm>
-          <a:prstGeom prst="curvedConnector3">
-            <a:avLst>
-              <a:gd name="adj1" fmla="val 50000"/>
-            </a:avLst>
-          </a:prstGeom>
-          <a:ln w="76200">
-            <a:solidFill>
-              <a:srgbClr val="002060"/>
-            </a:solidFill>
-            <a:tailEnd type="triangle"/>
-          </a:ln>
-        </p:spPr>
-        <p:style>
-          <a:lnRef idx="1">
-            <a:schemeClr val="accent1"/>
-          </a:lnRef>
-          <a:fillRef idx="0">
-            <a:schemeClr val="accent1"/>
-          </a:fillRef>
-          <a:effectRef idx="0">
-            <a:schemeClr val="accent1"/>
-          </a:effectRef>
-          <a:fontRef idx="minor">
-            <a:schemeClr val="tx1"/>
-          </a:fontRef>
-        </p:style>
-      </p:cxnSp>
-      <p:sp>
-        <p:nvSpPr>
-          <p:cNvPr id="19" name="ZoneTexte 18">
-            <a:extLst>
-              <a:ext uri="{FF2B5EF4-FFF2-40B4-BE49-F238E27FC236}">
-                <a16:creationId xmlns:a16="http://schemas.microsoft.com/office/drawing/2014/main" id="{362C3312-9CD4-773B-546E-C01121CB6607}"/>
-              </a:ext>
-            </a:extLst>
-          </p:cNvPr>
-          <p:cNvSpPr txBox="1"/>
-          <p:nvPr/>
-        </p:nvSpPr>
-        <p:spPr>
-          <a:xfrm>
-            <a:off x="375547" y="6550223"/>
-            <a:ext cx="4649734" cy="200055"/>
-          </a:xfrm>
-          <a:prstGeom prst="rect">
-            <a:avLst/>
-          </a:prstGeom>
-          <a:noFill/>
-        </p:spPr>
-        <p:txBody>
-          <a:bodyPr wrap="square">
-            <a:spAutoFit/>
-          </a:bodyPr>
-          <a:lstStyle/>
-          <a:p>
-            <a:pPr marR="0"/>
-            <a:r>
-              <a:rPr lang="fr-FR" sz="700" dirty="0">
-                <a:solidFill>
-                  <a:prstClr val="black"/>
-                </a:solidFill>
-                <a:latin typeface="Liberation Sans" panose="020B0604020202020204" pitchFamily="34" charset="0"/>
-              </a:rPr>
-              <a:t>Images : </a:t>
-            </a:r>
-            <a:r>
-              <a:rPr lang="fr-FR" sz="700" dirty="0" err="1">
-                <a:solidFill>
-                  <a:prstClr val="black"/>
-                </a:solidFill>
-                <a:latin typeface="Liberation Sans" panose="020B0604020202020204" pitchFamily="34" charset="0"/>
-              </a:rPr>
-              <a:t>Radiospares</a:t>
-            </a:r>
-            <a:r>
-              <a:rPr lang="fr-FR" sz="700" dirty="0">
-                <a:solidFill>
-                  <a:prstClr val="black"/>
-                </a:solidFill>
-                <a:latin typeface="Liberation Sans" panose="020B0604020202020204" pitchFamily="34" charset="0"/>
-              </a:rPr>
-              <a:t> / rs-online.com</a:t>
-            </a:r>
-            <a:endParaRPr lang="fr-FR" sz="1000" b="0" i="0" u="none" strike="noStrike" dirty="0">
-              <a:solidFill>
-                <a:prstClr val="black"/>
-              </a:solidFill>
-              <a:latin typeface="FreeSans"/>
-            </a:endParaRPr>
-          </a:p>
-        </p:txBody>
-      </p:sp>
-      <p:pic>
-        <p:nvPicPr>
-          <p:cNvPr id="21" name="Image 20">
-            <a:extLst>
-              <a:ext uri="{FF2B5EF4-FFF2-40B4-BE49-F238E27FC236}">
-                <a16:creationId xmlns:a16="http://schemas.microsoft.com/office/drawing/2014/main" id="{D289D4E5-09E8-AD42-73C0-C8471D6E7F79}"/>
-              </a:ext>
-            </a:extLst>
-          </p:cNvPr>
-          <p:cNvPicPr>
-            <a:picLocks noChangeAspect="1"/>
-          </p:cNvPicPr>
-          <p:nvPr/>
-        </p:nvPicPr>
-        <p:blipFill>
-          <a:blip r:embed="rId5"/>
-          <a:stretch>
-            <a:fillRect/>
-          </a:stretch>
-        </p:blipFill>
-        <p:spPr>
-          <a:xfrm>
             <a:off x="3234071" y="4692766"/>
             <a:ext cx="1381556" cy="1096068"/>
           </a:xfrm>
@@ -10981,7 +10951,7 @@
           <p:cNvPr id="5" name="Flèche : pentagone 4">
             <a:extLst>
               <a:ext uri="{FF2B5EF4-FFF2-40B4-BE49-F238E27FC236}">
-                <a16:creationId xmlns:a16="http://schemas.microsoft.com/office/drawing/2014/main" id="{DE014027-48F6-3532-BE99-567152928E09}"/>
+                <a16:creationId xmlns:a16="http://schemas.microsoft.com/office/drawing/2014/main" xmlns="" id="{DE014027-48F6-3532-BE99-567152928E09}"/>
               </a:ext>
             </a:extLst>
           </p:cNvPr>
@@ -11033,7 +11003,7 @@
           <p:cNvPr id="14" name="ZoneTexte 13">
             <a:extLst>
               <a:ext uri="{FF2B5EF4-FFF2-40B4-BE49-F238E27FC236}">
-                <a16:creationId xmlns:a16="http://schemas.microsoft.com/office/drawing/2014/main" id="{790C9144-7864-D612-F57A-71B9E80D5AF4}"/>
+                <a16:creationId xmlns:a16="http://schemas.microsoft.com/office/drawing/2014/main" xmlns="" id="{790C9144-7864-D612-F57A-71B9E80D5AF4}"/>
               </a:ext>
             </a:extLst>
           </p:cNvPr>
@@ -11068,7 +11038,7 @@
           <p:cNvPr id="15" name="ZoneTexte 14">
             <a:extLst>
               <a:ext uri="{FF2B5EF4-FFF2-40B4-BE49-F238E27FC236}">
-                <a16:creationId xmlns:a16="http://schemas.microsoft.com/office/drawing/2014/main" id="{AD251406-607D-E333-192F-46CA14B165F6}"/>
+                <a16:creationId xmlns:a16="http://schemas.microsoft.com/office/drawing/2014/main" xmlns="" id="{AD251406-607D-E333-192F-46CA14B165F6}"/>
               </a:ext>
             </a:extLst>
           </p:cNvPr>
@@ -11112,7 +11082,7 @@
           <p:cNvPr id="17" name="Rectangle : coins arrondis 16">
             <a:extLst>
               <a:ext uri="{FF2B5EF4-FFF2-40B4-BE49-F238E27FC236}">
-                <a16:creationId xmlns:a16="http://schemas.microsoft.com/office/drawing/2014/main" id="{0965991B-443A-8521-04F6-031FFAD9C80E}"/>
+                <a16:creationId xmlns:a16="http://schemas.microsoft.com/office/drawing/2014/main" xmlns="" id="{0965991B-443A-8521-04F6-031FFAD9C80E}"/>
               </a:ext>
             </a:extLst>
           </p:cNvPr>
@@ -11180,6 +11150,36 @@
           </a:p>
         </p:txBody>
       </p:sp>
+      <p:pic>
+        <p:nvPicPr>
+          <p:cNvPr id="25" name="Image 24"/>
+          <p:cNvPicPr>
+            <a:picLocks noChangeAspect="1"/>
+          </p:cNvPicPr>
+          <p:nvPr/>
+        </p:nvPicPr>
+        <p:blipFill>
+          <a:blip r:embed="rId5">
+            <a:extLst>
+              <a:ext uri="{28A0092B-C50C-407E-A947-70E740481C1C}">
+                <a14:useLocalDpi xmlns:a14="http://schemas.microsoft.com/office/drawing/2010/main" val="0"/>
+              </a:ext>
+            </a:extLst>
+          </a:blip>
+          <a:stretch>
+            <a:fillRect/>
+          </a:stretch>
+        </p:blipFill>
+        <p:spPr>
+          <a:xfrm>
+            <a:off x="9643587" y="452685"/>
+            <a:ext cx="2050702" cy="842404"/>
+          </a:xfrm>
+          <a:prstGeom prst="rect">
+            <a:avLst/>
+          </a:prstGeom>
+        </p:spPr>
+      </p:pic>
     </p:spTree>
     <p:extLst>
       <p:ext uri="{BB962C8B-B14F-4D97-AF65-F5344CB8AC3E}">
@@ -11201,7 +11201,7 @@
         <p:cNvPr id="1" name="">
           <a:extLst>
             <a:ext uri="{FF2B5EF4-FFF2-40B4-BE49-F238E27FC236}">
-              <a16:creationId xmlns:a16="http://schemas.microsoft.com/office/drawing/2014/main" id="{71C01F19-DB31-8668-339C-8F75B95BE738}"/>
+              <a16:creationId xmlns:a16="http://schemas.microsoft.com/office/drawing/2014/main" xmlns="" id="{71C01F19-DB31-8668-339C-8F75B95BE738}"/>
             </a:ext>
           </a:extLst>
         </p:cNvPr>
@@ -11221,7 +11221,7 @@
           <p:cNvPr id="3" name="Rectangle 2">
             <a:extLst>
               <a:ext uri="{FF2B5EF4-FFF2-40B4-BE49-F238E27FC236}">
-                <a16:creationId xmlns:a16="http://schemas.microsoft.com/office/drawing/2014/main" id="{82B949E1-8372-8FFA-6559-408F990036DF}"/>
+                <a16:creationId xmlns:a16="http://schemas.microsoft.com/office/drawing/2014/main" xmlns="" id="{82B949E1-8372-8FFA-6559-408F990036DF}"/>
               </a:ext>
             </a:extLst>
           </p:cNvPr>
@@ -11284,7 +11284,7 @@
           <p:cNvPr id="2" name="Titre 1">
             <a:extLst>
               <a:ext uri="{FF2B5EF4-FFF2-40B4-BE49-F238E27FC236}">
-                <a16:creationId xmlns:a16="http://schemas.microsoft.com/office/drawing/2014/main" id="{A08FEDDA-5C1C-F219-1E35-D5CAE8BB273E}"/>
+                <a16:creationId xmlns:a16="http://schemas.microsoft.com/office/drawing/2014/main" xmlns="" id="{A08FEDDA-5C1C-F219-1E35-D5CAE8BB273E}"/>
               </a:ext>
             </a:extLst>
           </p:cNvPr>
@@ -11343,7 +11343,7 @@
           <p:cNvPr id="7" name="Rectangle 6">
             <a:extLst>
               <a:ext uri="{FF2B5EF4-FFF2-40B4-BE49-F238E27FC236}">
-                <a16:creationId xmlns:a16="http://schemas.microsoft.com/office/drawing/2014/main" id="{16AFDFE1-050E-F7A2-21B9-DF298279DADE}"/>
+                <a16:creationId xmlns:a16="http://schemas.microsoft.com/office/drawing/2014/main" xmlns="" id="{16AFDFE1-050E-F7A2-21B9-DF298279DADE}"/>
               </a:ext>
             </a:extLst>
           </p:cNvPr>
@@ -11390,48 +11390,12 @@
           </a:p>
         </p:txBody>
       </p:sp>
-      <p:pic>
-        <p:nvPicPr>
-          <p:cNvPr id="4" name="Image 3" descr="Une image contenant texte&#10;&#10;Description générée automatiquement">
-            <a:extLst>
-              <a:ext uri="{FF2B5EF4-FFF2-40B4-BE49-F238E27FC236}">
-                <a16:creationId xmlns:a16="http://schemas.microsoft.com/office/drawing/2014/main" id="{65C7B308-F49C-B698-0A12-6213850AB356}"/>
-              </a:ext>
-            </a:extLst>
-          </p:cNvPr>
-          <p:cNvPicPr>
-            <a:picLocks noChangeAspect="1"/>
-          </p:cNvPicPr>
-          <p:nvPr/>
-        </p:nvPicPr>
-        <p:blipFill>
-          <a:blip r:embed="rId3" cstate="print">
-            <a:extLst>
-              <a:ext uri="{28A0092B-C50C-407E-A947-70E740481C1C}">
-                <a14:useLocalDpi xmlns:a14="http://schemas.microsoft.com/office/drawing/2010/main" val="0"/>
-              </a:ext>
-            </a:extLst>
-          </a:blip>
-          <a:stretch>
-            <a:fillRect/>
-          </a:stretch>
-        </p:blipFill>
-        <p:spPr>
-          <a:xfrm>
-            <a:off x="9808481" y="509288"/>
-            <a:ext cx="1825291" cy="749808"/>
-          </a:xfrm>
-          <a:prstGeom prst="rect">
-            <a:avLst/>
-          </a:prstGeom>
-        </p:spPr>
-      </p:pic>
       <p:sp>
         <p:nvSpPr>
           <p:cNvPr id="8" name="Rectangle : coins arrondis 7">
             <a:extLst>
               <a:ext uri="{FF2B5EF4-FFF2-40B4-BE49-F238E27FC236}">
-                <a16:creationId xmlns:a16="http://schemas.microsoft.com/office/drawing/2014/main" id="{0C249914-0AD1-5D97-4D19-F96E9F8B41BF}"/>
+                <a16:creationId xmlns:a16="http://schemas.microsoft.com/office/drawing/2014/main" xmlns="" id="{0C249914-0AD1-5D97-4D19-F96E9F8B41BF}"/>
               </a:ext>
             </a:extLst>
           </p:cNvPr>
@@ -11482,7 +11446,7 @@
           <p:cNvPr id="9" name="Flèche : pentagone 8">
             <a:extLst>
               <a:ext uri="{FF2B5EF4-FFF2-40B4-BE49-F238E27FC236}">
-                <a16:creationId xmlns:a16="http://schemas.microsoft.com/office/drawing/2014/main" id="{89B6E3ED-08B2-F068-665C-DBF5FBA1F6F4}"/>
+                <a16:creationId xmlns:a16="http://schemas.microsoft.com/office/drawing/2014/main" xmlns="" id="{89B6E3ED-08B2-F068-665C-DBF5FBA1F6F4}"/>
               </a:ext>
             </a:extLst>
           </p:cNvPr>
@@ -11534,7 +11498,7 @@
           <p:cNvPr id="12" name="Flèche : chevron 11">
             <a:extLst>
               <a:ext uri="{FF2B5EF4-FFF2-40B4-BE49-F238E27FC236}">
-                <a16:creationId xmlns:a16="http://schemas.microsoft.com/office/drawing/2014/main" id="{7078CD77-4923-553C-3E61-84FC1E8A3EF3}"/>
+                <a16:creationId xmlns:a16="http://schemas.microsoft.com/office/drawing/2014/main" xmlns="" id="{7078CD77-4923-553C-3E61-84FC1E8A3EF3}"/>
               </a:ext>
             </a:extLst>
           </p:cNvPr>
@@ -11590,7 +11554,7 @@
           <p:cNvPr id="6" name="Image 5">
             <a:extLst>
               <a:ext uri="{FF2B5EF4-FFF2-40B4-BE49-F238E27FC236}">
-                <a16:creationId xmlns:a16="http://schemas.microsoft.com/office/drawing/2014/main" id="{47FAD1C9-D6DF-0E14-8595-7ADDD48CE963}"/>
+                <a16:creationId xmlns:a16="http://schemas.microsoft.com/office/drawing/2014/main" xmlns="" id="{47FAD1C9-D6DF-0E14-8595-7ADDD48CE963}"/>
               </a:ext>
             </a:extLst>
           </p:cNvPr>
@@ -11600,7 +11564,7 @@
           <p:nvPr/>
         </p:nvPicPr>
         <p:blipFill>
-          <a:blip r:embed="rId4"/>
+          <a:blip r:embed="rId3"/>
           <a:stretch>
             <a:fillRect/>
           </a:stretch>
@@ -11620,7 +11584,7 @@
           <p:cNvPr id="5" name="Triangle isocèle 4">
             <a:extLst>
               <a:ext uri="{FF2B5EF4-FFF2-40B4-BE49-F238E27FC236}">
-                <a16:creationId xmlns:a16="http://schemas.microsoft.com/office/drawing/2014/main" id="{AD7EF57F-0014-F875-5DB5-0087A302908A}"/>
+                <a16:creationId xmlns:a16="http://schemas.microsoft.com/office/drawing/2014/main" xmlns="" id="{AD7EF57F-0014-F875-5DB5-0087A302908A}"/>
               </a:ext>
             </a:extLst>
           </p:cNvPr>
@@ -11682,7 +11646,7 @@
           <p:cNvPr id="14" name="ZoneTexte 13">
             <a:extLst>
               <a:ext uri="{FF2B5EF4-FFF2-40B4-BE49-F238E27FC236}">
-                <a16:creationId xmlns:a16="http://schemas.microsoft.com/office/drawing/2014/main" id="{6B0F9197-1F82-CDE0-0FCE-AD6F4CA945F1}"/>
+                <a16:creationId xmlns:a16="http://schemas.microsoft.com/office/drawing/2014/main" xmlns="" id="{6B0F9197-1F82-CDE0-0FCE-AD6F4CA945F1}"/>
               </a:ext>
             </a:extLst>
           </p:cNvPr>
@@ -11737,7 +11701,7 @@
           <p:cNvPr id="15" name="Rectangle : coins arrondis 14">
             <a:extLst>
               <a:ext uri="{FF2B5EF4-FFF2-40B4-BE49-F238E27FC236}">
-                <a16:creationId xmlns:a16="http://schemas.microsoft.com/office/drawing/2014/main" id="{604D5A3B-217F-4C60-A09F-75DAA65F2B53}"/>
+                <a16:creationId xmlns:a16="http://schemas.microsoft.com/office/drawing/2014/main" xmlns="" id="{604D5A3B-217F-4C60-A09F-75DAA65F2B53}"/>
               </a:ext>
             </a:extLst>
           </p:cNvPr>
@@ -11788,7 +11752,7 @@
           <p:cNvPr id="17" name="Flèche : pentagone 16">
             <a:extLst>
               <a:ext uri="{FF2B5EF4-FFF2-40B4-BE49-F238E27FC236}">
-                <a16:creationId xmlns:a16="http://schemas.microsoft.com/office/drawing/2014/main" id="{7DBD2D8E-FA37-9F11-2173-32AC5F3DED3B}"/>
+                <a16:creationId xmlns:a16="http://schemas.microsoft.com/office/drawing/2014/main" xmlns="" id="{7DBD2D8E-FA37-9F11-2173-32AC5F3DED3B}"/>
               </a:ext>
             </a:extLst>
           </p:cNvPr>
@@ -11840,7 +11804,7 @@
           <p:cNvPr id="1026" name="Picture 2" descr="LOT DE 10 AMPLI. OP. TL081">
             <a:extLst>
               <a:ext uri="{FF2B5EF4-FFF2-40B4-BE49-F238E27FC236}">
-                <a16:creationId xmlns:a16="http://schemas.microsoft.com/office/drawing/2014/main" id="{EC4D0EAD-0478-C136-FC7F-86F0C5CF4743}"/>
+                <a16:creationId xmlns:a16="http://schemas.microsoft.com/office/drawing/2014/main" xmlns="" id="{EC4D0EAD-0478-C136-FC7F-86F0C5CF4743}"/>
               </a:ext>
             </a:extLst>
           </p:cNvPr>
@@ -11850,7 +11814,7 @@
           <p:nvPr/>
         </p:nvPicPr>
         <p:blipFill>
-          <a:blip r:embed="rId5">
+          <a:blip r:embed="rId4" cstate="print">
             <a:extLst>
               <a:ext uri="{28A0092B-C50C-407E-A947-70E740481C1C}">
                 <a14:useLocalDpi xmlns:a14="http://schemas.microsoft.com/office/drawing/2010/main" val="0"/>
@@ -11887,7 +11851,37 @@
           <p:cNvPr id="22" name="Image 21">
             <a:extLst>
               <a:ext uri="{FF2B5EF4-FFF2-40B4-BE49-F238E27FC236}">
-                <a16:creationId xmlns:a16="http://schemas.microsoft.com/office/drawing/2014/main" id="{ADC80A34-FBBA-7CF9-EDCB-C1FE7B28E328}"/>
+                <a16:creationId xmlns:a16="http://schemas.microsoft.com/office/drawing/2014/main" xmlns="" id="{ADC80A34-FBBA-7CF9-EDCB-C1FE7B28E328}"/>
+              </a:ext>
+            </a:extLst>
+          </p:cNvPr>
+          <p:cNvPicPr>
+            <a:picLocks noChangeAspect="1"/>
+          </p:cNvPicPr>
+          <p:nvPr/>
+        </p:nvPicPr>
+        <p:blipFill>
+          <a:blip r:embed="rId5"/>
+          <a:stretch>
+            <a:fillRect/>
+          </a:stretch>
+        </p:blipFill>
+        <p:spPr>
+          <a:xfrm>
+            <a:off x="3304678" y="5124164"/>
+            <a:ext cx="1559191" cy="1150471"/>
+          </a:xfrm>
+          <a:prstGeom prst="rect">
+            <a:avLst/>
+          </a:prstGeom>
+        </p:spPr>
+      </p:pic>
+      <p:pic>
+        <p:nvPicPr>
+          <p:cNvPr id="24" name="Image 23">
+            <a:extLst>
+              <a:ext uri="{FF2B5EF4-FFF2-40B4-BE49-F238E27FC236}">
+                <a16:creationId xmlns:a16="http://schemas.microsoft.com/office/drawing/2014/main" xmlns="" id="{F3274D28-0407-5741-4699-8D87031DB46F}"/>
               </a:ext>
             </a:extLst>
           </p:cNvPr>
@@ -11904,8 +11898,8 @@
         </p:blipFill>
         <p:spPr>
           <a:xfrm>
-            <a:off x="3304678" y="5124164"/>
-            <a:ext cx="1559191" cy="1150471"/>
+            <a:off x="5418106" y="5141122"/>
+            <a:ext cx="1532052" cy="1394339"/>
           </a:xfrm>
           <a:prstGeom prst="rect">
             <a:avLst/>
@@ -11914,10 +11908,10 @@
       </p:pic>
       <p:pic>
         <p:nvPicPr>
-          <p:cNvPr id="24" name="Image 23">
-            <a:extLst>
-              <a:ext uri="{FF2B5EF4-FFF2-40B4-BE49-F238E27FC236}">
-                <a16:creationId xmlns:a16="http://schemas.microsoft.com/office/drawing/2014/main" id="{F3274D28-0407-5741-4699-8D87031DB46F}"/>
+          <p:cNvPr id="26" name="Image 25">
+            <a:extLst>
+              <a:ext uri="{FF2B5EF4-FFF2-40B4-BE49-F238E27FC236}">
+                <a16:creationId xmlns:a16="http://schemas.microsoft.com/office/drawing/2014/main" xmlns="" id="{8414F22A-B7DA-F6E8-4121-7C012E88C485}"/>
               </a:ext>
             </a:extLst>
           </p:cNvPr>
@@ -11934,36 +11928,6 @@
         </p:blipFill>
         <p:spPr>
           <a:xfrm>
-            <a:off x="5418106" y="5141122"/>
-            <a:ext cx="1532052" cy="1394339"/>
-          </a:xfrm>
-          <a:prstGeom prst="rect">
-            <a:avLst/>
-          </a:prstGeom>
-        </p:spPr>
-      </p:pic>
-      <p:pic>
-        <p:nvPicPr>
-          <p:cNvPr id="26" name="Image 25">
-            <a:extLst>
-              <a:ext uri="{FF2B5EF4-FFF2-40B4-BE49-F238E27FC236}">
-                <a16:creationId xmlns:a16="http://schemas.microsoft.com/office/drawing/2014/main" id="{8414F22A-B7DA-F6E8-4121-7C012E88C485}"/>
-              </a:ext>
-            </a:extLst>
-          </p:cNvPr>
-          <p:cNvPicPr>
-            <a:picLocks noChangeAspect="1"/>
-          </p:cNvPicPr>
-          <p:nvPr/>
-        </p:nvPicPr>
-        <p:blipFill>
-          <a:blip r:embed="rId8"/>
-          <a:stretch>
-            <a:fillRect/>
-          </a:stretch>
-        </p:blipFill>
-        <p:spPr>
-          <a:xfrm>
             <a:off x="1014113" y="5263057"/>
             <a:ext cx="2195219" cy="1033422"/>
           </a:xfrm>
@@ -11977,7 +11941,7 @@
           <p:cNvPr id="27" name="ZoneTexte 26">
             <a:extLst>
               <a:ext uri="{FF2B5EF4-FFF2-40B4-BE49-F238E27FC236}">
-                <a16:creationId xmlns:a16="http://schemas.microsoft.com/office/drawing/2014/main" id="{A97C856A-F235-F89E-F309-BAFEA5024AA3}"/>
+                <a16:creationId xmlns:a16="http://schemas.microsoft.com/office/drawing/2014/main" xmlns="" id="{A97C856A-F235-F89E-F309-BAFEA5024AA3}"/>
               </a:ext>
             </a:extLst>
           </p:cNvPr>
@@ -12016,7 +11980,7 @@
           <p:cNvPr id="28" name="Rectangle 27">
             <a:extLst>
               <a:ext uri="{FF2B5EF4-FFF2-40B4-BE49-F238E27FC236}">
-                <a16:creationId xmlns:a16="http://schemas.microsoft.com/office/drawing/2014/main" id="{1088310E-1DE1-C585-A697-0063D7E414E7}"/>
+                <a16:creationId xmlns:a16="http://schemas.microsoft.com/office/drawing/2014/main" xmlns="" id="{1088310E-1DE1-C585-A697-0063D7E414E7}"/>
               </a:ext>
             </a:extLst>
           </p:cNvPr>
@@ -12068,7 +12032,7 @@
           <p:cNvPr id="29" name="ZoneTexte 28">
             <a:extLst>
               <a:ext uri="{FF2B5EF4-FFF2-40B4-BE49-F238E27FC236}">
-                <a16:creationId xmlns:a16="http://schemas.microsoft.com/office/drawing/2014/main" id="{73581FE1-00B3-FF87-FCCC-BFFC6FCDE75A}"/>
+                <a16:creationId xmlns:a16="http://schemas.microsoft.com/office/drawing/2014/main" xmlns="" id="{73581FE1-00B3-FF87-FCCC-BFFC6FCDE75A}"/>
               </a:ext>
             </a:extLst>
           </p:cNvPr>
@@ -12108,7 +12072,7 @@
           <p:cNvPr id="31" name="Rectangle 30">
             <a:extLst>
               <a:ext uri="{FF2B5EF4-FFF2-40B4-BE49-F238E27FC236}">
-                <a16:creationId xmlns:a16="http://schemas.microsoft.com/office/drawing/2014/main" id="{4DE831EF-C141-16C6-9C54-545A90113FCB}"/>
+                <a16:creationId xmlns:a16="http://schemas.microsoft.com/office/drawing/2014/main" xmlns="" id="{4DE831EF-C141-16C6-9C54-545A90113FCB}"/>
               </a:ext>
             </a:extLst>
           </p:cNvPr>
@@ -12160,7 +12124,7 @@
           <p:cNvPr id="32" name="ZoneTexte 31">
             <a:extLst>
               <a:ext uri="{FF2B5EF4-FFF2-40B4-BE49-F238E27FC236}">
-                <a16:creationId xmlns:a16="http://schemas.microsoft.com/office/drawing/2014/main" id="{337CAB5D-9646-D562-CE47-61DCFA881DDD}"/>
+                <a16:creationId xmlns:a16="http://schemas.microsoft.com/office/drawing/2014/main" xmlns="" id="{337CAB5D-9646-D562-CE47-61DCFA881DDD}"/>
               </a:ext>
             </a:extLst>
           </p:cNvPr>
@@ -12203,7 +12167,7 @@
           <p:cNvPr id="33" name="Rectangle 32">
             <a:extLst>
               <a:ext uri="{FF2B5EF4-FFF2-40B4-BE49-F238E27FC236}">
-                <a16:creationId xmlns:a16="http://schemas.microsoft.com/office/drawing/2014/main" id="{49474BC5-9CB7-6F10-7E18-EA14F761F32D}"/>
+                <a16:creationId xmlns:a16="http://schemas.microsoft.com/office/drawing/2014/main" xmlns="" id="{49474BC5-9CB7-6F10-7E18-EA14F761F32D}"/>
               </a:ext>
             </a:extLst>
           </p:cNvPr>
@@ -12250,6 +12214,36 @@
           </a:p>
         </p:txBody>
       </p:sp>
+      <p:pic>
+        <p:nvPicPr>
+          <p:cNvPr id="25" name="Image 24"/>
+          <p:cNvPicPr>
+            <a:picLocks noChangeAspect="1"/>
+          </p:cNvPicPr>
+          <p:nvPr/>
+        </p:nvPicPr>
+        <p:blipFill>
+          <a:blip r:embed="rId8">
+            <a:extLst>
+              <a:ext uri="{28A0092B-C50C-407E-A947-70E740481C1C}">
+                <a14:useLocalDpi xmlns:a14="http://schemas.microsoft.com/office/drawing/2010/main" val="0"/>
+              </a:ext>
+            </a:extLst>
+          </a:blip>
+          <a:stretch>
+            <a:fillRect/>
+          </a:stretch>
+        </p:blipFill>
+        <p:spPr>
+          <a:xfrm>
+            <a:off x="9643587" y="452685"/>
+            <a:ext cx="2050702" cy="842404"/>
+          </a:xfrm>
+          <a:prstGeom prst="rect">
+            <a:avLst/>
+          </a:prstGeom>
+        </p:spPr>
+      </p:pic>
     </p:spTree>
     <p:extLst>
       <p:ext uri="{BB962C8B-B14F-4D97-AF65-F5344CB8AC3E}">
@@ -12293,10 +12287,10 @@
           <p:cNvPr id="9" name="Rectangle 8">
             <a:extLst>
               <a:ext uri="{FF2B5EF4-FFF2-40B4-BE49-F238E27FC236}">
-                <a16:creationId xmlns:a16="http://schemas.microsoft.com/office/drawing/2014/main" id="{526E0BFB-CDF1-4990-8C11-AC849311E0A8}"/>
+                <a16:creationId xmlns:a16="http://schemas.microsoft.com/office/drawing/2014/main" xmlns="" id="{526E0BFB-CDF1-4990-8C11-AC849311E0A8}"/>
               </a:ext>
               <a:ext uri="{C183D7F6-B498-43B3-948B-1728B52AA6E4}">
-                <adec:decorative xmlns:adec="http://schemas.microsoft.com/office/drawing/2017/decorative" val="1"/>
+                <adec:decorative xmlns:adec="http://schemas.microsoft.com/office/drawing/2017/decorative" xmlns="" val="1"/>
               </a:ext>
             </a:extLst>
           </p:cNvPr>
@@ -12306,7 +12300,7 @@
           <p:nvPr>
             <p:extLst>
               <p:ext uri="{386F3935-93C4-4BCD-93E2-E3B085C9AB24}">
-                <p16:designElem xmlns:p16="http://schemas.microsoft.com/office/powerpoint/2015/main" val="1"/>
+                <p16:designElem xmlns:p16="http://schemas.microsoft.com/office/powerpoint/2015/main" xmlns="" val="1"/>
               </p:ext>
             </p:extLst>
           </p:nvPr>
@@ -12353,7 +12347,7 @@
           <p:cNvPr id="4" name="Picture 3">
             <a:extLst>
               <a:ext uri="{FF2B5EF4-FFF2-40B4-BE49-F238E27FC236}">
-                <a16:creationId xmlns:a16="http://schemas.microsoft.com/office/drawing/2014/main" id="{4C72F330-992B-B125-739B-F8303ED3A097}"/>
+                <a16:creationId xmlns:a16="http://schemas.microsoft.com/office/drawing/2014/main" xmlns="" id="{4C72F330-992B-B125-739B-F8303ED3A097}"/>
               </a:ext>
             </a:extLst>
           </p:cNvPr>
@@ -12382,10 +12376,10 @@
           <p:cNvPr id="11" name="Rectangle 10">
             <a:extLst>
               <a:ext uri="{FF2B5EF4-FFF2-40B4-BE49-F238E27FC236}">
-                <a16:creationId xmlns:a16="http://schemas.microsoft.com/office/drawing/2014/main" id="{6069A1F8-9BEB-4786-9694-FC48B2D75D21}"/>
+                <a16:creationId xmlns:a16="http://schemas.microsoft.com/office/drawing/2014/main" xmlns="" id="{6069A1F8-9BEB-4786-9694-FC48B2D75D21}"/>
               </a:ext>
               <a:ext uri="{C183D7F6-B498-43B3-948B-1728B52AA6E4}">
-                <adec:decorative xmlns:adec="http://schemas.microsoft.com/office/drawing/2017/decorative" val="1"/>
+                <adec:decorative xmlns:adec="http://schemas.microsoft.com/office/drawing/2017/decorative" xmlns="" val="1"/>
               </a:ext>
             </a:extLst>
           </p:cNvPr>
@@ -12395,7 +12389,7 @@
           <p:nvPr>
             <p:extLst>
               <p:ext uri="{386F3935-93C4-4BCD-93E2-E3B085C9AB24}">
-                <p16:designElem xmlns:p16="http://schemas.microsoft.com/office/powerpoint/2015/main" val="1"/>
+                <p16:designElem xmlns:p16="http://schemas.microsoft.com/office/powerpoint/2015/main" xmlns="" val="1"/>
               </p:ext>
             </p:extLst>
           </p:nvPr>
@@ -12463,7 +12457,7 @@
           <p:cNvPr id="2" name="Titre 1">
             <a:extLst>
               <a:ext uri="{FF2B5EF4-FFF2-40B4-BE49-F238E27FC236}">
-                <a16:creationId xmlns:a16="http://schemas.microsoft.com/office/drawing/2014/main" id="{CF8D1EB8-F6E7-EB54-1CC8-28472070B9FC}"/>
+                <a16:creationId xmlns:a16="http://schemas.microsoft.com/office/drawing/2014/main" xmlns="" id="{CF8D1EB8-F6E7-EB54-1CC8-28472070B9FC}"/>
               </a:ext>
             </a:extLst>
           </p:cNvPr>
@@ -12503,7 +12497,7 @@
           <p:cNvPr id="3" name="Sous-titre 2">
             <a:extLst>
               <a:ext uri="{FF2B5EF4-FFF2-40B4-BE49-F238E27FC236}">
-                <a16:creationId xmlns:a16="http://schemas.microsoft.com/office/drawing/2014/main" id="{BDFEFAEF-AB6A-BE8F-01E7-845FB609FA07}"/>
+                <a16:creationId xmlns:a16="http://schemas.microsoft.com/office/drawing/2014/main" xmlns="" id="{BDFEFAEF-AB6A-BE8F-01E7-845FB609FA07}"/>
               </a:ext>
             </a:extLst>
           </p:cNvPr>
@@ -12559,10 +12553,10 @@
           <p:cNvPr id="32" name="Rectangle 12">
             <a:extLst>
               <a:ext uri="{FF2B5EF4-FFF2-40B4-BE49-F238E27FC236}">
-                <a16:creationId xmlns:a16="http://schemas.microsoft.com/office/drawing/2014/main" id="{AF2F604E-43BE-4DC3-B983-E071523364F8}"/>
+                <a16:creationId xmlns:a16="http://schemas.microsoft.com/office/drawing/2014/main" xmlns="" id="{AF2F604E-43BE-4DC3-B983-E071523364F8}"/>
               </a:ext>
               <a:ext uri="{C183D7F6-B498-43B3-948B-1728B52AA6E4}">
-                <adec:decorative xmlns:adec="http://schemas.microsoft.com/office/drawing/2017/decorative" val="1"/>
+                <adec:decorative xmlns:adec="http://schemas.microsoft.com/office/drawing/2017/decorative" xmlns="" val="1"/>
               </a:ext>
             </a:extLst>
           </p:cNvPr>
@@ -12572,7 +12566,7 @@
           <p:nvPr>
             <p:extLst>
               <p:ext uri="{386F3935-93C4-4BCD-93E2-E3B085C9AB24}">
-                <p16:designElem xmlns:p16="http://schemas.microsoft.com/office/powerpoint/2015/main" val="1"/>
+                <p16:designElem xmlns:p16="http://schemas.microsoft.com/office/powerpoint/2015/main" xmlns="" val="1"/>
               </p:ext>
             </p:extLst>
           </p:nvPr>
@@ -12651,10 +12645,10 @@
           <p:cNvPr id="33" name="Rectangle 14">
             <a:extLst>
               <a:ext uri="{FF2B5EF4-FFF2-40B4-BE49-F238E27FC236}">
-                <a16:creationId xmlns:a16="http://schemas.microsoft.com/office/drawing/2014/main" id="{08C9B587-E65E-4B52-B37C-ABEBB6E87928}"/>
+                <a16:creationId xmlns:a16="http://schemas.microsoft.com/office/drawing/2014/main" xmlns="" id="{08C9B587-E65E-4B52-B37C-ABEBB6E87928}"/>
               </a:ext>
               <a:ext uri="{C183D7F6-B498-43B3-948B-1728B52AA6E4}">
-                <adec:decorative xmlns:adec="http://schemas.microsoft.com/office/drawing/2017/decorative" val="1"/>
+                <adec:decorative xmlns:adec="http://schemas.microsoft.com/office/drawing/2017/decorative" xmlns="" val="1"/>
               </a:ext>
             </a:extLst>
           </p:cNvPr>
@@ -12664,7 +12658,7 @@
           <p:nvPr>
             <p:extLst>
               <p:ext uri="{386F3935-93C4-4BCD-93E2-E3B085C9AB24}">
-                <p16:designElem xmlns:p16="http://schemas.microsoft.com/office/powerpoint/2015/main" val="1"/>
+                <p16:designElem xmlns:p16="http://schemas.microsoft.com/office/powerpoint/2015/main" xmlns="" val="1"/>
               </p:ext>
             </p:extLst>
           </p:nvPr>
@@ -12741,13 +12735,7 @@
       </p:sp>
       <p:pic>
         <p:nvPicPr>
-          <p:cNvPr id="6" name="Image 5" descr="Une image contenant texte&#10;&#10;Description générée automatiquement">
-            <a:extLst>
-              <a:ext uri="{FF2B5EF4-FFF2-40B4-BE49-F238E27FC236}">
-                <a16:creationId xmlns:a16="http://schemas.microsoft.com/office/drawing/2014/main" id="{3D75D9F9-6192-EA6A-A7C9-F09C6FC342AD}"/>
-              </a:ext>
-            </a:extLst>
-          </p:cNvPr>
+          <p:cNvPr id="10" name="Image 9"/>
           <p:cNvPicPr>
             <a:picLocks noChangeAspect="1"/>
           </p:cNvPicPr>
@@ -12767,8 +12755,8 @@
         </p:blipFill>
         <p:spPr>
           <a:xfrm>
-            <a:off x="168033" y="195172"/>
-            <a:ext cx="2452178" cy="1007326"/>
+            <a:off x="93781" y="145408"/>
+            <a:ext cx="2694463" cy="1106854"/>
           </a:xfrm>
           <a:prstGeom prst="rect">
             <a:avLst/>
@@ -12810,7 +12798,7 @@
           <p:cNvPr id="2" name="Titre 1">
             <a:extLst>
               <a:ext uri="{FF2B5EF4-FFF2-40B4-BE49-F238E27FC236}">
-                <a16:creationId xmlns:a16="http://schemas.microsoft.com/office/drawing/2014/main" id="{693DE99D-D7A2-89F5-4CDD-A4230BF00E5E}"/>
+                <a16:creationId xmlns:a16="http://schemas.microsoft.com/office/drawing/2014/main" xmlns="" id="{693DE99D-D7A2-89F5-4CDD-A4230BF00E5E}"/>
               </a:ext>
             </a:extLst>
           </p:cNvPr>
@@ -12838,7 +12826,7 @@
           <p:cNvPr id="5" name="Image 4">
             <a:extLst>
               <a:ext uri="{FF2B5EF4-FFF2-40B4-BE49-F238E27FC236}">
-                <a16:creationId xmlns:a16="http://schemas.microsoft.com/office/drawing/2014/main" id="{D25615BA-E509-3273-4031-675E8C0E5E68}"/>
+                <a16:creationId xmlns:a16="http://schemas.microsoft.com/office/drawing/2014/main" xmlns="" id="{D25615BA-E509-3273-4031-675E8C0E5E68}"/>
               </a:ext>
             </a:extLst>
           </p:cNvPr>
@@ -12868,7 +12856,7 @@
           <p:cNvPr id="6" name="Image 5">
             <a:extLst>
               <a:ext uri="{FF2B5EF4-FFF2-40B4-BE49-F238E27FC236}">
-                <a16:creationId xmlns:a16="http://schemas.microsoft.com/office/drawing/2014/main" id="{11B8BE14-FBFA-B232-3834-FF44C1789B1B}"/>
+                <a16:creationId xmlns:a16="http://schemas.microsoft.com/office/drawing/2014/main" xmlns="" id="{11B8BE14-FBFA-B232-3834-FF44C1789B1B}"/>
               </a:ext>
             </a:extLst>
           </p:cNvPr>
@@ -12898,7 +12886,7 @@
           <p:cNvPr id="7" name="Image 6">
             <a:extLst>
               <a:ext uri="{FF2B5EF4-FFF2-40B4-BE49-F238E27FC236}">
-                <a16:creationId xmlns:a16="http://schemas.microsoft.com/office/drawing/2014/main" id="{183A1C47-7B34-F7B7-DB23-43C79D86D766}"/>
+                <a16:creationId xmlns:a16="http://schemas.microsoft.com/office/drawing/2014/main" xmlns="" id="{183A1C47-7B34-F7B7-DB23-43C79D86D766}"/>
               </a:ext>
             </a:extLst>
           </p:cNvPr>
@@ -12928,7 +12916,7 @@
           <p:cNvPr id="10" name="Image 9">
             <a:extLst>
               <a:ext uri="{FF2B5EF4-FFF2-40B4-BE49-F238E27FC236}">
-                <a16:creationId xmlns:a16="http://schemas.microsoft.com/office/drawing/2014/main" id="{3DF17ACC-61F6-EA66-87AE-E1FB2798FE8F}"/>
+                <a16:creationId xmlns:a16="http://schemas.microsoft.com/office/drawing/2014/main" xmlns="" id="{3DF17ACC-61F6-EA66-87AE-E1FB2798FE8F}"/>
               </a:ext>
             </a:extLst>
           </p:cNvPr>
@@ -12988,7 +12976,7 @@
           <p:cNvPr id="7" name="Image 6">
             <a:extLst>
               <a:ext uri="{FF2B5EF4-FFF2-40B4-BE49-F238E27FC236}">
-                <a16:creationId xmlns:a16="http://schemas.microsoft.com/office/drawing/2014/main" id="{8AB73770-127F-410F-7D44-3AEA449E7A2C}"/>
+                <a16:creationId xmlns:a16="http://schemas.microsoft.com/office/drawing/2014/main" xmlns="" id="{8AB73770-127F-410F-7D44-3AEA449E7A2C}"/>
               </a:ext>
             </a:extLst>
           </p:cNvPr>
@@ -13018,7 +13006,7 @@
           <p:cNvPr id="5" name="Image 4">
             <a:extLst>
               <a:ext uri="{FF2B5EF4-FFF2-40B4-BE49-F238E27FC236}">
-                <a16:creationId xmlns:a16="http://schemas.microsoft.com/office/drawing/2014/main" id="{A71C9A66-FD84-0971-7D7A-C122064CE838}"/>
+                <a16:creationId xmlns:a16="http://schemas.microsoft.com/office/drawing/2014/main" xmlns="" id="{A71C9A66-FD84-0971-7D7A-C122064CE838}"/>
               </a:ext>
             </a:extLst>
           </p:cNvPr>
@@ -13048,7 +13036,7 @@
           <p:cNvPr id="2" name="Titre 1">
             <a:extLst>
               <a:ext uri="{FF2B5EF4-FFF2-40B4-BE49-F238E27FC236}">
-                <a16:creationId xmlns:a16="http://schemas.microsoft.com/office/drawing/2014/main" id="{693DE99D-D7A2-89F5-4CDD-A4230BF00E5E}"/>
+                <a16:creationId xmlns:a16="http://schemas.microsoft.com/office/drawing/2014/main" xmlns="" id="{693DE99D-D7A2-89F5-4CDD-A4230BF00E5E}"/>
               </a:ext>
             </a:extLst>
           </p:cNvPr>
@@ -13076,7 +13064,7 @@
           <p:cNvPr id="6" name="Image 5">
             <a:extLst>
               <a:ext uri="{FF2B5EF4-FFF2-40B4-BE49-F238E27FC236}">
-                <a16:creationId xmlns:a16="http://schemas.microsoft.com/office/drawing/2014/main" id="{05D91B67-991B-E3AC-CDD3-0514D83511C5}"/>
+                <a16:creationId xmlns:a16="http://schemas.microsoft.com/office/drawing/2014/main" xmlns="" id="{05D91B67-991B-E3AC-CDD3-0514D83511C5}"/>
               </a:ext>
             </a:extLst>
           </p:cNvPr>
@@ -13106,7 +13094,7 @@
           <p:cNvPr id="18" name="Image 17">
             <a:extLst>
               <a:ext uri="{FF2B5EF4-FFF2-40B4-BE49-F238E27FC236}">
-                <a16:creationId xmlns:a16="http://schemas.microsoft.com/office/drawing/2014/main" id="{16039821-AF07-B8AA-D4AD-AD1473AAF213}"/>
+                <a16:creationId xmlns:a16="http://schemas.microsoft.com/office/drawing/2014/main" xmlns="" id="{16039821-AF07-B8AA-D4AD-AD1473AAF213}"/>
               </a:ext>
             </a:extLst>
           </p:cNvPr>
@@ -13136,7 +13124,7 @@
           <p:cNvPr id="4" name="ZoneTexte 3">
             <a:extLst>
               <a:ext uri="{FF2B5EF4-FFF2-40B4-BE49-F238E27FC236}">
-                <a16:creationId xmlns:a16="http://schemas.microsoft.com/office/drawing/2014/main" id="{E3D999F0-1CE6-BDB7-A59E-7965B1770FEE}"/>
+                <a16:creationId xmlns:a16="http://schemas.microsoft.com/office/drawing/2014/main" xmlns="" id="{E3D999F0-1CE6-BDB7-A59E-7965B1770FEE}"/>
               </a:ext>
             </a:extLst>
           </p:cNvPr>
@@ -13171,7 +13159,7 @@
           <p:cNvPr id="9" name="ZoneTexte 8">
             <a:extLst>
               <a:ext uri="{FF2B5EF4-FFF2-40B4-BE49-F238E27FC236}">
-                <a16:creationId xmlns:a16="http://schemas.microsoft.com/office/drawing/2014/main" id="{84354B60-386D-4DA1-893C-60C9648C6B6A}"/>
+                <a16:creationId xmlns:a16="http://schemas.microsoft.com/office/drawing/2014/main" xmlns="" id="{84354B60-386D-4DA1-893C-60C9648C6B6A}"/>
               </a:ext>
             </a:extLst>
           </p:cNvPr>
@@ -13236,7 +13224,7 @@
           <p:cNvPr id="7" name="Image 6">
             <a:extLst>
               <a:ext uri="{FF2B5EF4-FFF2-40B4-BE49-F238E27FC236}">
-                <a16:creationId xmlns:a16="http://schemas.microsoft.com/office/drawing/2014/main" id="{8AB73770-127F-410F-7D44-3AEA449E7A2C}"/>
+                <a16:creationId xmlns:a16="http://schemas.microsoft.com/office/drawing/2014/main" xmlns="" id="{8AB73770-127F-410F-7D44-3AEA449E7A2C}"/>
               </a:ext>
             </a:extLst>
           </p:cNvPr>
@@ -13266,7 +13254,7 @@
           <p:cNvPr id="2" name="Titre 1">
             <a:extLst>
               <a:ext uri="{FF2B5EF4-FFF2-40B4-BE49-F238E27FC236}">
-                <a16:creationId xmlns:a16="http://schemas.microsoft.com/office/drawing/2014/main" id="{693DE99D-D7A2-89F5-4CDD-A4230BF00E5E}"/>
+                <a16:creationId xmlns:a16="http://schemas.microsoft.com/office/drawing/2014/main" xmlns="" id="{693DE99D-D7A2-89F5-4CDD-A4230BF00E5E}"/>
               </a:ext>
             </a:extLst>
           </p:cNvPr>
@@ -13294,7 +13282,7 @@
           <p:cNvPr id="4" name="Image 3">
             <a:extLst>
               <a:ext uri="{FF2B5EF4-FFF2-40B4-BE49-F238E27FC236}">
-                <a16:creationId xmlns:a16="http://schemas.microsoft.com/office/drawing/2014/main" id="{20239FE2-0D87-6889-76B9-152D65A8D781}"/>
+                <a16:creationId xmlns:a16="http://schemas.microsoft.com/office/drawing/2014/main" xmlns="" id="{20239FE2-0D87-6889-76B9-152D65A8D781}"/>
               </a:ext>
             </a:extLst>
           </p:cNvPr>
@@ -13324,7 +13312,7 @@
           <p:cNvPr id="9" name="Image 8">
             <a:extLst>
               <a:ext uri="{FF2B5EF4-FFF2-40B4-BE49-F238E27FC236}">
-                <a16:creationId xmlns:a16="http://schemas.microsoft.com/office/drawing/2014/main" id="{19DF2C12-21C1-B5E2-C1B9-386CE83CC75E}"/>
+                <a16:creationId xmlns:a16="http://schemas.microsoft.com/office/drawing/2014/main" xmlns="" id="{19DF2C12-21C1-B5E2-C1B9-386CE83CC75E}"/>
               </a:ext>
             </a:extLst>
           </p:cNvPr>
@@ -13354,7 +13342,7 @@
           <p:cNvPr id="10" name="Image 9">
             <a:extLst>
               <a:ext uri="{FF2B5EF4-FFF2-40B4-BE49-F238E27FC236}">
-                <a16:creationId xmlns:a16="http://schemas.microsoft.com/office/drawing/2014/main" id="{1082A5FF-57A8-5065-4A64-96E48AD40470}"/>
+                <a16:creationId xmlns:a16="http://schemas.microsoft.com/office/drawing/2014/main" xmlns="" id="{1082A5FF-57A8-5065-4A64-96E48AD40470}"/>
               </a:ext>
             </a:extLst>
           </p:cNvPr>
@@ -13384,7 +13372,7 @@
           <p:cNvPr id="8" name="Image 7">
             <a:extLst>
               <a:ext uri="{FF2B5EF4-FFF2-40B4-BE49-F238E27FC236}">
-                <a16:creationId xmlns:a16="http://schemas.microsoft.com/office/drawing/2014/main" id="{60849CB4-5BF0-FF65-BA19-AC02E67EA2D9}"/>
+                <a16:creationId xmlns:a16="http://schemas.microsoft.com/office/drawing/2014/main" xmlns="" id="{60849CB4-5BF0-FF65-BA19-AC02E67EA2D9}"/>
               </a:ext>
             </a:extLst>
           </p:cNvPr>
